--- a/slides/political-findings.pptx
+++ b/slides/political-findings.pptx
@@ -18,9 +18,11 @@
     <p:sldId id="266" r:id="rId12"/>
     <p:sldId id="267" r:id="rId13"/>
     <p:sldId id="268" r:id="rId14"/>
+    <p:sldId id="269" r:id="rId15"/>
+    <p:sldId id="270" r:id="rId16"/>
   </p:sldIdLst>
   <p:notesMasterIdLst>
-    <p:notesMasterId r:id="rId15"/>
+    <p:notesMasterId r:id="rId17"/>
   </p:notesMasterIdLst>
   <p:sldSz cx="12192000" cy="6858000"/>
   <p:notesSz cx="6858000" cy="12192000"/>
@@ -2256,6 +2258,582 @@
 </c:chartSpace>
 </file>
 
+<file path=ppt/charts/chart8.xml><?xml version="1.0" encoding="utf-8"?>
+<c:chartSpace xmlns:c="http://schemas.openxmlformats.org/drawingml/2006/chart" xmlns:a="http://schemas.openxmlformats.org/drawingml/2006/main" xmlns:r="http://schemas.openxmlformats.org/officeDocument/2006/relationships">
+  <c:date1904 val="0"/>
+  <c:roundedCorners val="1"/>
+  <c:chart>
+    <c:autoTitleDeleted val="1"/>
+    <c:plotArea>
+      <c:layout/>
+      <c:barChart>
+        <c:barDir val="col"/>
+        <c:grouping val="clustered"/>
+        <c:varyColors val="0"/>
+        <c:ser>
+          <c:idx val="0"/>
+          <c:order val="0"/>
+          <c:tx>
+            <c:strRef>
+              <c:f>Sheet1!$B$1</c:f>
+              <c:strCache>
+                <c:ptCount val="1"/>
+                <c:pt idx="0">
+                  <c:v>Cheapest U.S. electric option</c:v>
+                </c:pt>
+              </c:strCache>
+            </c:strRef>
+          </c:tx>
+          <c:spPr>
+            <a:solidFill>
+              <a:srgbClr val="3081AE"/>
+            </a:solidFill>
+            <a:effectLst/>
+          </c:spPr>
+          <c:invertIfNegative val="0"/>
+          <c:dLbls>
+            <c:numFmt formatCode="$#,##0" sourceLinked="0"/>
+            <c:txPr>
+              <a:bodyPr/>
+              <a:lstStyle/>
+              <a:p>
+                <a:pPr>
+                  <a:defRPr b="0" i="0" strike="noStrike" sz="1100" u="none">
+                    <a:solidFill>
+                      <a:srgbClr val="13202B"/>
+                    </a:solidFill>
+                    <a:latin typeface="Calibri"/>
+                  </a:defRPr>
+                </a:pPr>
+              </a:p>
+            </c:txPr>
+            <c:showLegendKey val="0"/>
+            <c:showVal val="1"/>
+            <c:showCatName val="0"/>
+            <c:showSerName val="0"/>
+            <c:showPercent val="0"/>
+            <c:showBubbleSize val="0"/>
+            <c:showLeaderLines val="0"/>
+          </c:dLbls>
+          <c:dPt>
+            <c:idx val="0"/>
+            <c:invertIfNegative val="0"/>
+            <c:bubble3D val="0"/>
+            <c:spPr>
+              <a:solidFill>
+                <a:srgbClr val="3081AE"/>
+              </a:solidFill>
+              <a:effectLst/>
+            </c:spPr>
+          </c:dPt>
+          <c:dPt>
+            <c:idx val="1"/>
+            <c:invertIfNegative val="0"/>
+            <c:bubble3D val="0"/>
+            <c:spPr>
+              <a:solidFill>
+                <a:srgbClr val="3081AE"/>
+              </a:solidFill>
+              <a:effectLst/>
+            </c:spPr>
+          </c:dPt>
+          <c:dPt>
+            <c:idx val="2"/>
+            <c:invertIfNegative val="0"/>
+            <c:bubble3D val="0"/>
+            <c:spPr>
+              <a:solidFill>
+                <a:srgbClr val="3081AE"/>
+              </a:solidFill>
+              <a:effectLst/>
+            </c:spPr>
+          </c:dPt>
+          <c:dPt>
+            <c:idx val="3"/>
+            <c:invertIfNegative val="0"/>
+            <c:bubble3D val="0"/>
+            <c:spPr>
+              <a:solidFill>
+                <a:srgbClr val="D99A16"/>
+              </a:solidFill>
+              <a:effectLst/>
+            </c:spPr>
+          </c:dPt>
+          <c:dPt>
+            <c:idx val="4"/>
+            <c:invertIfNegative val="0"/>
+            <c:bubble3D val="0"/>
+            <c:spPr>
+              <a:solidFill>
+                <a:srgbClr val="D99A16"/>
+              </a:solidFill>
+              <a:effectLst/>
+            </c:spPr>
+          </c:dPt>
+          <c:cat>
+            <c:multiLvlStrRef>
+              <c:f>Sheet1!$A$2:$A$6</c:f>
+              <c:multiLvlStrCache>
+                <c:ptCount val="5"/>
+                <c:lvl>
+                  <c:pt idx="0">
+                    <c:v>Supermini</c:v>
+                  </c:pt>
+                  <c:pt idx="1">
+                    <c:v>Compact SUV</c:v>
+                  </c:pt>
+                  <c:pt idx="2">
+                    <c:v>Mid-size SUV</c:v>
+                  </c:pt>
+                  <c:pt idx="3">
+                    <c:v>Pickup</c:v>
+                  </c:pt>
+                  <c:pt idx="4">
+                    <c:v>Full-size SUV</c:v>
+                  </c:pt>
+                </c:lvl>
+              </c:multiLvlStrCache>
+            </c:multiLvlStrRef>
+          </c:cat>
+          <c:val>
+            <c:numRef>
+              <c:f>Sheet1!$B$2:$B$6</c:f>
+              <c:numCache>
+                <c:formatCode>General</c:formatCode>
+                <c:ptCount val="5"/>
+                <c:pt idx="0">
+                  <c:v>28995</c:v>
+                </c:pt>
+                <c:pt idx="1">
+                  <c:v>36495</c:v>
+                </c:pt>
+                <c:pt idx="2">
+                  <c:v>39990</c:v>
+                </c:pt>
+                <c:pt idx="3">
+                  <c:v>52800</c:v>
+                </c:pt>
+                <c:pt idx="4">
+                  <c:v>54900</c:v>
+                </c:pt>
+              </c:numCache>
+            </c:numRef>
+          </c:val>
+        </c:ser>
+        <c:dLbls>
+          <c:numFmt formatCode="$#,##0" sourceLinked="0"/>
+          <c:txPr>
+            <a:bodyPr/>
+            <a:lstStyle/>
+            <a:p>
+              <a:pPr>
+                <a:defRPr b="0" i="0" strike="noStrike" sz="1100" u="none">
+                  <a:solidFill>
+                    <a:srgbClr val="13202B"/>
+                  </a:solidFill>
+                  <a:latin typeface="Calibri"/>
+                </a:defRPr>
+              </a:pPr>
+            </a:p>
+          </c:txPr>
+          <c:showLegendKey val="0"/>
+          <c:showVal val="1"/>
+          <c:showCatName val="0"/>
+          <c:showSerName val="0"/>
+          <c:showPercent val="0"/>
+          <c:showBubbleSize val="0"/>
+          <c:showLeaderLines val="0"/>
+        </c:dLbls>
+        <c:gapWidth val="50"/>
+        <c:overlap val="0"/>
+        <c:axId val="2094734554"/>
+        <c:axId val="2094734552"/>
+        <c:axId val="2094734556"/>
+      </c:barChart>
+      <c:catAx>
+        <c:axId val="2094734554"/>
+        <c:scaling>
+          <c:orientation val="minMax"/>
+        </c:scaling>
+        <c:delete val="0"/>
+        <c:axPos val="b"/>
+        <c:numFmt formatCode="General" sourceLinked="1"/>
+        <c:majorTickMark val="out"/>
+        <c:minorTickMark val="none"/>
+        <c:tickLblPos val="low"/>
+        <c:spPr>
+          <a:ln w="12700" cap="flat">
+            <a:noFill/>
+            <a:prstDash val="solid"/>
+            <a:round/>
+          </a:ln>
+        </c:spPr>
+        <c:txPr>
+          <a:bodyPr/>
+          <a:lstStyle/>
+          <a:p>
+            <a:pPr>
+              <a:defRPr sz="1100" b="0" i="0" u="none" strike="noStrike">
+                <a:solidFill>
+                  <a:srgbClr val="5A6E7C"/>
+                </a:solidFill>
+                <a:latin typeface="Calibri"/>
+              </a:defRPr>
+            </a:pPr>
+            <a:endParaRPr lang="en-US"/>
+          </a:p>
+        </c:txPr>
+        <c:crossAx val="2094734552"/>
+        <c:crosses val="autoZero"/>
+        <c:auto val="1"/>
+        <c:lblAlgn val="ctr"/>
+        <c:noMultiLvlLbl val="1"/>
+      </c:catAx>
+      <c:valAx>
+        <c:axId val="2094734552"/>
+        <c:scaling>
+          <c:orientation val="minMax"/>
+        </c:scaling>
+        <c:delete val="0"/>
+        <c:axPos val="l"/>
+        <c:majorGridlines>
+          <c:spPr>
+            <a:ln w="12700" cap="flat">
+              <a:solidFill>
+                <a:srgbClr val="DDE5EA"/>
+              </a:solidFill>
+              <a:prstDash val="solid"/>
+              <a:round/>
+            </a:ln>
+          </c:spPr>
+        </c:majorGridlines>
+        <c:numFmt formatCode="General" sourceLinked="0"/>
+        <c:majorTickMark val="out"/>
+        <c:minorTickMark val="none"/>
+        <c:tickLblPos val="nextTo"/>
+        <c:spPr>
+          <a:ln w="12700" cap="flat">
+            <a:noFill/>
+            <a:prstDash val="solid"/>
+            <a:round/>
+          </a:ln>
+        </c:spPr>
+        <c:txPr>
+          <a:bodyPr/>
+          <a:lstStyle/>
+          <a:p>
+            <a:pPr>
+              <a:defRPr sz="1000" b="0" i="0" u="none" strike="noStrike">
+                <a:solidFill>
+                  <a:srgbClr val="5A6E7C"/>
+                </a:solidFill>
+                <a:latin typeface="Calibri"/>
+              </a:defRPr>
+            </a:pPr>
+            <a:endParaRPr lang="en-US"/>
+          </a:p>
+        </c:txPr>
+        <c:crossAx val="2094734554"/>
+        <c:crosses val="autoZero"/>
+        <c:crossBetween val="between"/>
+      </c:valAx>
+      <c:spPr>
+        <a:noFill/>
+        <a:ln>
+          <a:noFill/>
+        </a:ln>
+        <a:effectLst/>
+      </c:spPr>
+    </c:plotArea>
+    <c:plotVisOnly val="1"/>
+    <c:dispBlanksAs val="span"/>
+  </c:chart>
+  <c:spPr>
+    <a:noFill/>
+    <a:ln>
+      <a:noFill/>
+    </a:ln>
+    <a:effectLst/>
+  </c:spPr>
+  <c:externalData r:id="rId1">
+    <c:autoUpdate val="0"/>
+  </c:externalData>
+</c:chartSpace>
+</file>
+
+<file path=ppt/charts/chart9.xml><?xml version="1.0" encoding="utf-8"?>
+<c:chartSpace xmlns:c="http://schemas.openxmlformats.org/drawingml/2006/chart" xmlns:a="http://schemas.openxmlformats.org/drawingml/2006/main" xmlns:r="http://schemas.openxmlformats.org/officeDocument/2006/relationships">
+  <c:date1904 val="0"/>
+  <c:roundedCorners val="1"/>
+  <c:chart>
+    <c:autoTitleDeleted val="1"/>
+    <c:plotArea>
+      <c:layout/>
+      <c:barChart>
+        <c:barDir val="col"/>
+        <c:grouping val="clustered"/>
+        <c:varyColors val="0"/>
+        <c:ser>
+          <c:idx val="0"/>
+          <c:order val="0"/>
+          <c:tx>
+            <c:strRef>
+              <c:f>Sheet1!$B$1</c:f>
+              <c:strCache>
+                <c:ptCount val="1"/>
+                <c:pt idx="0">
+                  <c:v>Premium over the gasoline version</c:v>
+                </c:pt>
+              </c:strCache>
+            </c:strRef>
+          </c:tx>
+          <c:spPr>
+            <a:solidFill>
+              <a:srgbClr val="15A48E"/>
+            </a:solidFill>
+            <a:effectLst/>
+          </c:spPr>
+          <c:invertIfNegative val="0"/>
+          <c:dLbls>
+            <c:numFmt formatCode="+$#,##0;-$#,##0" sourceLinked="0"/>
+            <c:txPr>
+              <a:bodyPr/>
+              <a:lstStyle/>
+              <a:p>
+                <a:pPr>
+                  <a:defRPr b="0" i="0" strike="noStrike" sz="1100" u="none">
+                    <a:solidFill>
+                      <a:srgbClr val="13202B"/>
+                    </a:solidFill>
+                    <a:latin typeface="Calibri"/>
+                  </a:defRPr>
+                </a:pPr>
+              </a:p>
+            </c:txPr>
+            <c:showLegendKey val="0"/>
+            <c:showVal val="1"/>
+            <c:showCatName val="0"/>
+            <c:showSerName val="0"/>
+            <c:showPercent val="0"/>
+            <c:showBubbleSize val="0"/>
+            <c:showLeaderLines val="0"/>
+          </c:dLbls>
+          <c:dPt>
+            <c:idx val="0"/>
+            <c:invertIfNegative val="0"/>
+            <c:bubble3D val="0"/>
+            <c:spPr>
+              <a:solidFill>
+                <a:srgbClr val="15A48E"/>
+              </a:solidFill>
+              <a:effectLst/>
+            </c:spPr>
+          </c:dPt>
+          <c:dPt>
+            <c:idx val="1"/>
+            <c:invertIfNegative val="0"/>
+            <c:bubble3D val="0"/>
+            <c:spPr>
+              <a:solidFill>
+                <a:srgbClr val="3081AE"/>
+              </a:solidFill>
+              <a:effectLst/>
+            </c:spPr>
+          </c:dPt>
+          <c:dPt>
+            <c:idx val="2"/>
+            <c:invertIfNegative val="0"/>
+            <c:bubble3D val="0"/>
+            <c:spPr>
+              <a:solidFill>
+                <a:srgbClr val="C0392B"/>
+              </a:solidFill>
+              <a:effectLst/>
+            </c:spPr>
+          </c:dPt>
+          <c:cat>
+            <c:multiLvlStrRef>
+              <c:f>Sheet1!$A$2:$A$4</c:f>
+              <c:multiLvlStrCache>
+                <c:ptCount val="3"/>
+                <c:lvl>
+                  <c:pt idx="0">
+                    <c:v>Battery-electric
+with the credit
+(to Sept 2025)</c:v>
+                  </c:pt>
+                  <c:pt idx="1">
+                    <c:v>Hybrid
+(never subsidised)</c:v>
+                  </c:pt>
+                  <c:pt idx="2">
+                    <c:v>Battery-electric
+today</c:v>
+                  </c:pt>
+                </c:lvl>
+              </c:multiLvlStrCache>
+            </c:multiLvlStrRef>
+          </c:cat>
+          <c:val>
+            <c:numRef>
+              <c:f>Sheet1!$B$2:$B$4</c:f>
+              <c:numCache>
+                <c:formatCode>General</c:formatCode>
+                <c:ptCount val="3"/>
+                <c:pt idx="0">
+                  <c:v>-1000</c:v>
+                </c:pt>
+                <c:pt idx="1">
+                  <c:v>4710</c:v>
+                </c:pt>
+                <c:pt idx="2">
+                  <c:v>6500</c:v>
+                </c:pt>
+              </c:numCache>
+            </c:numRef>
+          </c:val>
+        </c:ser>
+        <c:dLbls>
+          <c:numFmt formatCode="+$#,##0;-$#,##0" sourceLinked="0"/>
+          <c:txPr>
+            <a:bodyPr/>
+            <a:lstStyle/>
+            <a:p>
+              <a:pPr>
+                <a:defRPr b="0" i="0" strike="noStrike" sz="1100" u="none">
+                  <a:solidFill>
+                    <a:srgbClr val="13202B"/>
+                  </a:solidFill>
+                  <a:latin typeface="Calibri"/>
+                </a:defRPr>
+              </a:pPr>
+            </a:p>
+          </c:txPr>
+          <c:showLegendKey val="0"/>
+          <c:showVal val="1"/>
+          <c:showCatName val="0"/>
+          <c:showSerName val="0"/>
+          <c:showPercent val="0"/>
+          <c:showBubbleSize val="0"/>
+          <c:showLeaderLines val="0"/>
+        </c:dLbls>
+        <c:gapWidth val="58"/>
+        <c:overlap val="0"/>
+        <c:axId val="2094734554"/>
+        <c:axId val="2094734552"/>
+        <c:axId val="2094734556"/>
+      </c:barChart>
+      <c:catAx>
+        <c:axId val="2094734554"/>
+        <c:scaling>
+          <c:orientation val="minMax"/>
+        </c:scaling>
+        <c:delete val="0"/>
+        <c:axPos val="b"/>
+        <c:numFmt formatCode="General" sourceLinked="1"/>
+        <c:majorTickMark val="out"/>
+        <c:minorTickMark val="none"/>
+        <c:tickLblPos val="low"/>
+        <c:spPr>
+          <a:ln w="12700" cap="flat">
+            <a:noFill/>
+            <a:prstDash val="solid"/>
+            <a:round/>
+          </a:ln>
+        </c:spPr>
+        <c:txPr>
+          <a:bodyPr/>
+          <a:lstStyle/>
+          <a:p>
+            <a:pPr>
+              <a:defRPr sz="1100" b="0" i="0" u="none" strike="noStrike">
+                <a:solidFill>
+                  <a:srgbClr val="5A6E7C"/>
+                </a:solidFill>
+                <a:latin typeface="Calibri"/>
+              </a:defRPr>
+            </a:pPr>
+            <a:endParaRPr lang="en-US"/>
+          </a:p>
+        </c:txPr>
+        <c:crossAx val="2094734552"/>
+        <c:crosses val="autoZero"/>
+        <c:auto val="1"/>
+        <c:lblAlgn val="ctr"/>
+        <c:noMultiLvlLbl val="1"/>
+      </c:catAx>
+      <c:valAx>
+        <c:axId val="2094734552"/>
+        <c:scaling>
+          <c:orientation val="minMax"/>
+        </c:scaling>
+        <c:delete val="0"/>
+        <c:axPos val="l"/>
+        <c:majorGridlines>
+          <c:spPr>
+            <a:ln w="12700" cap="flat">
+              <a:solidFill>
+                <a:srgbClr val="DDE5EA"/>
+              </a:solidFill>
+              <a:prstDash val="solid"/>
+              <a:round/>
+            </a:ln>
+          </c:spPr>
+        </c:majorGridlines>
+        <c:numFmt formatCode="General" sourceLinked="0"/>
+        <c:majorTickMark val="out"/>
+        <c:minorTickMark val="none"/>
+        <c:tickLblPos val="nextTo"/>
+        <c:spPr>
+          <a:ln w="12700" cap="flat">
+            <a:noFill/>
+            <a:prstDash val="solid"/>
+            <a:round/>
+          </a:ln>
+        </c:spPr>
+        <c:txPr>
+          <a:bodyPr/>
+          <a:lstStyle/>
+          <a:p>
+            <a:pPr>
+              <a:defRPr sz="1000" b="0" i="0" u="none" strike="noStrike">
+                <a:solidFill>
+                  <a:srgbClr val="5A6E7C"/>
+                </a:solidFill>
+                <a:latin typeface="Calibri"/>
+              </a:defRPr>
+            </a:pPr>
+            <a:endParaRPr lang="en-US"/>
+          </a:p>
+        </c:txPr>
+        <c:crossAx val="2094734554"/>
+        <c:crosses val="autoZero"/>
+        <c:crossBetween val="between"/>
+      </c:valAx>
+      <c:spPr>
+        <a:noFill/>
+        <a:ln>
+          <a:noFill/>
+        </a:ln>
+        <a:effectLst/>
+      </c:spPr>
+    </c:plotArea>
+    <c:plotVisOnly val="1"/>
+    <c:dispBlanksAs val="span"/>
+  </c:chart>
+  <c:spPr>
+    <a:noFill/>
+    <a:ln>
+      <a:noFill/>
+    </a:ln>
+    <a:effectLst/>
+  </c:spPr>
+  <c:externalData r:id="rId1">
+    <c:autoUpdate val="0"/>
+  </c:externalData>
+</c:chartSpace>
+</file>
+
 <file path=ppt/notesMasters/notesMaster1.xml><?xml version="1.0" encoding="utf-8"?>
 <p:notesMaster xmlns:a="http://schemas.openxmlformats.org/drawingml/2006/main" xmlns:r="http://schemas.openxmlformats.org/officeDocument/2006/relationships" xmlns:p="http://schemas.openxmlformats.org/presentationml/2006/main">
   <p:cSld>
@@ -2915,7 +3493,7 @@
           <a:p>
             <a:r>
               <a:rPr lang="en-US" dirty="0"/>
-              <a:t>Probabilities are directional judgements, not model outputs. The near-certainties are near-certain because they are already law.</a:t>
+              <a:t>Strong and innovative above $50,000, absent below $29,000. Neither policy set out to build a barbell; both did.</a:t>
             </a:r>
             <a:endParaRPr lang="en-US" dirty="0"/>
           </a:p>
@@ -3003,7 +3581,7 @@
           <a:p>
             <a:r>
               <a:rPr lang="en-US" dirty="0"/>
-              <a:t/>
+              <a:t>Remove support from one powertrain and leave the other untouched, and the hybrid takes the middle of the market by default.</a:t>
             </a:r>
             <a:endParaRPr lang="en-US" dirty="0"/>
           </a:p>
@@ -3027,6 +3605,182 @@
             <a:fld id="{F7021451-1387-4CA6-816F-3879F97B5CBC}" type="slidenum">
               <a:rPr lang="en-US"/>
               <a:t>13</a:t>
+            </a:fld>
+            <a:endParaRPr lang="en-US"/>
+          </a:p>
+        </p:txBody>
+      </p:sp>
+    </p:spTree>
+    <p:extLst>
+      <p:ext uri="{BB962C8B-B14F-4D97-AF65-F5344CB8AC3E}">
+        <p14:creationId xmlns:p14="http://schemas.microsoft.com/office/powerpoint/2010/main" val="1024086991"/>
+      </p:ext>
+    </p:extLst>
+  </p:cSld>
+  <p:clrMapOvr>
+    <a:masterClrMapping/>
+  </p:clrMapOvr>
+</p:notes>
+</file>
+
+<file path=ppt/notesSlides/notesSlide14.xml><?xml version="1.0" encoding="utf-8"?>
+<p:notes xmlns:a="http://schemas.openxmlformats.org/drawingml/2006/main" xmlns:r="http://schemas.openxmlformats.org/officeDocument/2006/relationships" xmlns:p="http://schemas.openxmlformats.org/presentationml/2006/main">
+  <p:cSld>
+    <p:spTree>
+      <p:nvGrpSpPr>
+        <p:cNvPr id="1" name=""/>
+        <p:cNvGrpSpPr/>
+        <p:nvPr/>
+      </p:nvGrpSpPr>
+      <p:grpSpPr>
+        <a:xfrm>
+          <a:off x="0" y="0"/>
+          <a:ext cx="0" cy="0"/>
+          <a:chOff x="0" y="0"/>
+          <a:chExt cx="0" cy="0"/>
+        </a:xfrm>
+      </p:grpSpPr>
+      <p:sp>
+        <p:nvSpPr>
+          <p:cNvPr id="2" name="Slide Image Placeholder 1"/>
+          <p:cNvSpPr>
+            <a:spLocks noGrp="1" noRot="1" noChangeAspect="1"/>
+          </p:cNvSpPr>
+          <p:nvPr>
+            <p:ph type="sldImg"/>
+          </p:nvPr>
+        </p:nvSpPr>
+        <p:spPr/>
+      </p:sp>
+      <p:sp>
+        <p:nvSpPr>
+          <p:cNvPr id="3" name="Notes Placeholder 2"/>
+          <p:cNvSpPr>
+            <a:spLocks noGrp="1"/>
+          </p:cNvSpPr>
+          <p:nvPr>
+            <p:ph type="body" idx="1"/>
+          </p:nvPr>
+        </p:nvSpPr>
+        <p:spPr/>
+        <p:txBody>
+          <a:bodyPr/>
+          <a:lstStyle/>
+          <a:p>
+            <a:r>
+              <a:rPr lang="en-US" dirty="0"/>
+              <a:t>Probabilities are directional judgements, not model outputs. The near-certainties are near-certain because they are already law.</a:t>
+            </a:r>
+            <a:endParaRPr lang="en-US" dirty="0"/>
+          </a:p>
+        </p:txBody>
+      </p:sp>
+      <p:sp>
+        <p:nvSpPr>
+          <p:cNvPr id="4" name="Slide Number Placeholder 3"/>
+          <p:cNvSpPr>
+            <a:spLocks noGrp="1"/>
+          </p:cNvSpPr>
+          <p:nvPr>
+            <p:ph type="sldNum" sz="quarter" idx="10"/>
+          </p:nvPr>
+        </p:nvSpPr>
+        <p:spPr/>
+        <p:txBody>
+          <a:bodyPr/>
+          <a:lstStyle/>
+          <a:p>
+            <a:fld id="{F7021451-1387-4CA6-816F-3879F97B5CBC}" type="slidenum">
+              <a:rPr lang="en-US"/>
+              <a:t>14</a:t>
+            </a:fld>
+            <a:endParaRPr lang="en-US"/>
+          </a:p>
+        </p:txBody>
+      </p:sp>
+    </p:spTree>
+    <p:extLst>
+      <p:ext uri="{BB962C8B-B14F-4D97-AF65-F5344CB8AC3E}">
+        <p14:creationId xmlns:p14="http://schemas.microsoft.com/office/powerpoint/2010/main" val="1024086991"/>
+      </p:ext>
+    </p:extLst>
+  </p:cSld>
+  <p:clrMapOvr>
+    <a:masterClrMapping/>
+  </p:clrMapOvr>
+</p:notes>
+</file>
+
+<file path=ppt/notesSlides/notesSlide15.xml><?xml version="1.0" encoding="utf-8"?>
+<p:notes xmlns:a="http://schemas.openxmlformats.org/drawingml/2006/main" xmlns:r="http://schemas.openxmlformats.org/officeDocument/2006/relationships" xmlns:p="http://schemas.openxmlformats.org/presentationml/2006/main">
+  <p:cSld>
+    <p:spTree>
+      <p:nvGrpSpPr>
+        <p:cNvPr id="1" name=""/>
+        <p:cNvGrpSpPr/>
+        <p:nvPr/>
+      </p:nvGrpSpPr>
+      <p:grpSpPr>
+        <a:xfrm>
+          <a:off x="0" y="0"/>
+          <a:ext cx="0" cy="0"/>
+          <a:chOff x="0" y="0"/>
+          <a:chExt cx="0" cy="0"/>
+        </a:xfrm>
+      </p:grpSpPr>
+      <p:sp>
+        <p:nvSpPr>
+          <p:cNvPr id="2" name="Slide Image Placeholder 1"/>
+          <p:cNvSpPr>
+            <a:spLocks noGrp="1" noRot="1" noChangeAspect="1"/>
+          </p:cNvSpPr>
+          <p:nvPr>
+            <p:ph type="sldImg"/>
+          </p:nvPr>
+        </p:nvSpPr>
+        <p:spPr/>
+      </p:sp>
+      <p:sp>
+        <p:nvSpPr>
+          <p:cNvPr id="3" name="Notes Placeholder 2"/>
+          <p:cNvSpPr>
+            <a:spLocks noGrp="1"/>
+          </p:cNvSpPr>
+          <p:nvPr>
+            <p:ph type="body" idx="1"/>
+          </p:nvPr>
+        </p:nvSpPr>
+        <p:spPr/>
+        <p:txBody>
+          <a:bodyPr/>
+          <a:lstStyle/>
+          <a:p>
+            <a:r>
+              <a:rPr lang="en-US" dirty="0"/>
+              <a:t/>
+            </a:r>
+            <a:endParaRPr lang="en-US" dirty="0"/>
+          </a:p>
+        </p:txBody>
+      </p:sp>
+      <p:sp>
+        <p:nvSpPr>
+          <p:cNvPr id="4" name="Slide Number Placeholder 3"/>
+          <p:cNvSpPr>
+            <a:spLocks noGrp="1"/>
+          </p:cNvSpPr>
+          <p:nvPr>
+            <p:ph type="sldNum" sz="quarter" idx="10"/>
+          </p:nvPr>
+        </p:nvSpPr>
+        <p:spPr/>
+        <p:txBody>
+          <a:bodyPr/>
+          <a:lstStyle/>
+          <a:p>
+            <a:fld id="{F7021451-1387-4CA6-816F-3879F97B5CBC}" type="slidenum">
+              <a:rPr lang="en-US"/>
+              <a:t>15</a:t>
             </a:fld>
             <a:endParaRPr lang="en-US"/>
           </a:p>
@@ -5329,7 +6083,7 @@
                 <a:ea typeface="Calibri" pitchFamily="34" charset="-122"/>
                 <a:cs typeface="Calibri" pitchFamily="34" charset="-120"/>
               </a:rPr>
-              <a:t>OUTLOOK</a:t>
+              <a:t>BY BODY TYPE</a:t>
             </a:r>
             <a:endParaRPr lang="en-US" sz="1100" dirty="0"/>
           </a:p>
@@ -5368,7 +6122,7 @@
                 <a:ea typeface="Cambria" pitchFamily="34" charset="-122"/>
                 <a:cs typeface="Cambria" pitchFamily="34" charset="-120"/>
               </a:rPr>
-              <a:t>What to expect through 2030</a:t>
+              <a:t>The American EV market is barbell-shaped</a:t>
             </a:r>
             <a:endParaRPr lang="en-US" sz="2900" dirty="0"/>
           </a:p>
@@ -5407,30 +6161,46 @@
                 <a:ea typeface="Calibri" pitchFamily="34" charset="-122"/>
                 <a:cs typeface="Calibri" pitchFamily="34" charset="-120"/>
               </a:rPr>
-              <a:t>Two changes since the analysis was drafted matter more than anything on a watch list.</a:t>
+              <a:t>Cheapest electric option in the U.S., by body type. Two categories have no product at all — for two different reasons.</a:t>
             </a:r>
             <a:endParaRPr lang="en-US" sz="1400" dirty="0"/>
           </a:p>
         </p:txBody>
       </p:sp>
-      <p:sp>
-        <p:nvSpPr>
-          <p:cNvPr id="5" name="Shape 3"/>
+      <p:graphicFrame>
+        <p:nvGraphicFramePr>
+          <p:cNvPr id="5" name="Chart 0" descr=""/>
+          <p:cNvGraphicFramePr/>
+          <p:nvPr/>
+        </p:nvGraphicFramePr>
+        <p:xfrm>
+          <a:off x="566928" y="2139696"/>
+          <a:ext cx="6858000" cy="3566160"/>
+        </p:xfrm>
+        <a:graphic xmlns:a="http://schemas.openxmlformats.org/drawingml/2006/main">
+          <a:graphicData uri="http://schemas.openxmlformats.org/drawingml/2006/chart">
+            <c:chart xmlns:c="http://schemas.openxmlformats.org/drawingml/2006/chart" r:id="rId1"/>
+          </a:graphicData>
+        </a:graphic>
+      </p:graphicFrame>
+      <p:sp>
+        <p:nvSpPr>
+          <p:cNvPr id="6" name="Shape 3"/>
           <p:cNvSpPr/>
           <p:nvPr/>
         </p:nvSpPr>
         <p:spPr>
           <a:xfrm>
-            <a:off x="566928" y="2029968"/>
-            <a:ext cx="11027664" cy="923544"/>
+            <a:off x="7699248" y="2139696"/>
+            <a:ext cx="3895344" cy="1700784"/>
           </a:xfrm>
           <a:prstGeom prst="roundRect">
             <a:avLst>
-              <a:gd name="adj" fmla="val 5941"/>
+              <a:gd name="adj" fmla="val 3226"/>
             </a:avLst>
           </a:prstGeom>
           <a:solidFill>
-            <a:srgbClr val="E9F0F4"/>
+            <a:srgbClr val="FBEDEB"/>
           </a:solidFill>
           <a:ln w="9525">
             <a:solidFill>
@@ -5442,30 +6212,30 @@
       </p:sp>
       <p:sp>
         <p:nvSpPr>
-          <p:cNvPr id="6" name="Text 4"/>
-          <p:cNvSpPr txBox="1"/>
-          <p:nvPr/>
-        </p:nvSpPr>
-        <p:spPr>
-          <a:xfrm>
-            <a:off x="822960" y="2286000"/>
-            <a:ext cx="1298448" cy="438912"/>
-          </a:xfrm>
-          <a:prstGeom prst="rect">
-            <a:avLst/>
-          </a:prstGeom>
-          <a:noFill/>
-          <a:ln/>
-        </p:spPr>
-        <p:txBody>
-          <a:bodyPr wrap="square" lIns="0" tIns="0" rIns="0" bIns="0" rtlCol="0" anchor="ctr"/>
-          <a:lstStyle/>
-          <a:p>
-            <a:pPr indent="0" marL="0">
-              <a:buNone/>
-            </a:pPr>
-            <a:r>
-              <a:rPr lang="en-US" sz="2200" b="1" dirty="0">
+          <p:cNvPr id="7" name="Text 4"/>
+          <p:cNvSpPr txBox="1"/>
+          <p:nvPr/>
+        </p:nvSpPr>
+        <p:spPr>
+          <a:xfrm>
+            <a:off x="7955280" y="2286000"/>
+            <a:ext cx="3383280" cy="310896"/>
+          </a:xfrm>
+          <a:prstGeom prst="rect">
+            <a:avLst/>
+          </a:prstGeom>
+          <a:noFill/>
+          <a:ln/>
+        </p:spPr>
+        <p:txBody>
+          <a:bodyPr wrap="square" lIns="0" tIns="0" rIns="0" bIns="0" rtlCol="0" anchor="ctr"/>
+          <a:lstStyle/>
+          <a:p>
+            <a:pPr indent="0" marL="0">
+              <a:buNone/>
+            </a:pPr>
+            <a:r>
+              <a:rPr lang="en-US" sz="1800" b="1" dirty="0">
                 <a:solidFill>
                   <a:srgbClr val="C0392B"/>
                 </a:solidFill>
@@ -5473,38 +6243,38 @@
                 <a:ea typeface="Cambria" pitchFamily="34" charset="-122"/>
                 <a:cs typeface="Cambria" pitchFamily="34" charset="-120"/>
               </a:rPr>
-              <a:t>≈85%</a:t>
-            </a:r>
-            <a:endParaRPr lang="en-US" sz="2200" dirty="0"/>
-          </a:p>
-        </p:txBody>
-      </p:sp>
-      <p:sp>
-        <p:nvSpPr>
-          <p:cNvPr id="7" name="Text 5"/>
-          <p:cNvSpPr txBox="1"/>
-          <p:nvPr/>
-        </p:nvSpPr>
-        <p:spPr>
-          <a:xfrm>
-            <a:off x="2231136" y="2157984"/>
-            <a:ext cx="3931920" cy="685800"/>
-          </a:xfrm>
-          <a:prstGeom prst="rect">
-            <a:avLst/>
-          </a:prstGeom>
-          <a:noFill/>
-          <a:ln/>
-        </p:spPr>
-        <p:txBody>
-          <a:bodyPr wrap="square" lIns="0" tIns="0" rIns="0" bIns="0" rtlCol="0" anchor="ctr"/>
-          <a:lstStyle/>
-          <a:p>
-            <a:pPr indent="0" marL="0">
-              <a:buNone/>
-            </a:pPr>
-            <a:r>
-              <a:rPr lang="en-US" sz="1300" b="1" dirty="0">
+              <a:t>City car</a:t>
+            </a:r>
+            <a:endParaRPr lang="en-US" sz="1800" dirty="0"/>
+          </a:p>
+        </p:txBody>
+      </p:sp>
+      <p:sp>
+        <p:nvSpPr>
+          <p:cNvPr id="8" name="Text 5"/>
+          <p:cNvSpPr txBox="1"/>
+          <p:nvPr/>
+        </p:nvSpPr>
+        <p:spPr>
+          <a:xfrm>
+            <a:off x="7955280" y="2642616"/>
+            <a:ext cx="3383280" cy="310896"/>
+          </a:xfrm>
+          <a:prstGeom prst="rect">
+            <a:avLst/>
+          </a:prstGeom>
+          <a:noFill/>
+          <a:ln/>
+        </p:spPr>
+        <p:txBody>
+          <a:bodyPr wrap="square" lIns="0" tIns="0" rIns="0" bIns="0" rtlCol="0" anchor="ctr"/>
+          <a:lstStyle/>
+          <a:p>
+            <a:pPr indent="0" marL="0">
+              <a:buNone/>
+            </a:pPr>
+            <a:r>
+              <a:rPr lang="en-US" sz="1200" b="1" dirty="0">
                 <a:solidFill>
                   <a:srgbClr val="13202B"/>
                 </a:solidFill>
@@ -5512,22 +6282,22 @@
                 <a:ea typeface="Calibri" pitchFamily="34" charset="-122"/>
                 <a:cs typeface="Calibri" pitchFamily="34" charset="-120"/>
               </a:rPr>
-              <a:t>The floor stays empty to 2030</a:t>
-            </a:r>
-            <a:endParaRPr lang="en-US" sz="1300" dirty="0"/>
-          </a:p>
-        </p:txBody>
-      </p:sp>
-      <p:sp>
-        <p:nvSpPr>
-          <p:cNvPr id="8" name="Text 6"/>
-          <p:cNvSpPr txBox="1"/>
-          <p:nvPr/>
-        </p:nvSpPr>
-        <p:spPr>
-          <a:xfrm>
-            <a:off x="6327648" y="2157984"/>
-            <a:ext cx="5029200" cy="685800"/>
+              <a:t>No product at any price</a:t>
+            </a:r>
+            <a:endParaRPr lang="en-US" sz="1200" dirty="0"/>
+          </a:p>
+        </p:txBody>
+      </p:sp>
+      <p:sp>
+        <p:nvSpPr>
+          <p:cNvPr id="9" name="Text 6"/>
+          <p:cNvSpPr txBox="1"/>
+          <p:nvPr/>
+        </p:nvSpPr>
+        <p:spPr>
+          <a:xfrm>
+            <a:off x="7955280" y="2980944"/>
+            <a:ext cx="3383280" cy="749808"/>
           </a:xfrm>
           <a:prstGeom prst="rect">
             <a:avLst/>
@@ -5551,7 +6321,7 @@
                 <a:ea typeface="Calibri" pitchFamily="34" charset="-122"/>
                 <a:cs typeface="Calibri" pitchFamily="34" charset="-120"/>
               </a:rPr>
-              <a:t>The codifying bill is bipartisan — Moreno (R) and Slotkin (D) — and framed as security, not climate. A chamber flipping in November does not touch it.</a:t>
+              <a:t>Supply-side: the Chinese-EV prohibition. Europe has four rivals under $20,000.</a:t>
             </a:r>
             <a:endParaRPr lang="en-US" sz="1100" dirty="0"/>
           </a:p>
@@ -5559,22 +6329,22 @@
       </p:sp>
       <p:sp>
         <p:nvSpPr>
-          <p:cNvPr id="9" name="Shape 7"/>
+          <p:cNvPr id="10" name="Shape 7"/>
           <p:cNvSpPr/>
           <p:nvPr/>
         </p:nvSpPr>
         <p:spPr>
           <a:xfrm>
-            <a:off x="566928" y="3063240"/>
-            <a:ext cx="11027664" cy="923544"/>
+            <a:off x="7699248" y="3986784"/>
+            <a:ext cx="3895344" cy="1700784"/>
           </a:xfrm>
           <a:prstGeom prst="roundRect">
             <a:avLst>
-              <a:gd name="adj" fmla="val 5941"/>
+              <a:gd name="adj" fmla="val 3226"/>
             </a:avLst>
           </a:prstGeom>
           <a:solidFill>
-            <a:srgbClr val="E9F0F4"/>
+            <a:srgbClr val="FBEDEB"/>
           </a:solidFill>
           <a:ln w="9525">
             <a:solidFill>
@@ -5586,69 +6356,69 @@
       </p:sp>
       <p:sp>
         <p:nvSpPr>
-          <p:cNvPr id="10" name="Text 8"/>
-          <p:cNvSpPr txBox="1"/>
-          <p:nvPr/>
-        </p:nvSpPr>
-        <p:spPr>
-          <a:xfrm>
-            <a:off x="822960" y="3319272"/>
-            <a:ext cx="1298448" cy="438912"/>
-          </a:xfrm>
-          <a:prstGeom prst="rect">
-            <a:avLst/>
-          </a:prstGeom>
-          <a:noFill/>
-          <a:ln/>
-        </p:spPr>
-        <p:txBody>
-          <a:bodyPr wrap="square" lIns="0" tIns="0" rIns="0" bIns="0" rtlCol="0" anchor="ctr"/>
-          <a:lstStyle/>
-          <a:p>
-            <a:pPr indent="0" marL="0">
-              <a:buNone/>
-            </a:pPr>
-            <a:r>
-              <a:rPr lang="en-US" sz="2200" b="1" dirty="0">
-                <a:solidFill>
-                  <a:srgbClr val="D99A16"/>
+          <p:cNvPr id="11" name="Text 8"/>
+          <p:cNvSpPr txBox="1"/>
+          <p:nvPr/>
+        </p:nvSpPr>
+        <p:spPr>
+          <a:xfrm>
+            <a:off x="7955280" y="4133088"/>
+            <a:ext cx="3383280" cy="310896"/>
+          </a:xfrm>
+          <a:prstGeom prst="rect">
+            <a:avLst/>
+          </a:prstGeom>
+          <a:noFill/>
+          <a:ln/>
+        </p:spPr>
+        <p:txBody>
+          <a:bodyPr wrap="square" lIns="0" tIns="0" rIns="0" bIns="0" rtlCol="0" anchor="ctr"/>
+          <a:lstStyle/>
+          <a:p>
+            <a:pPr indent="0" marL="0">
+              <a:buNone/>
+            </a:pPr>
+            <a:r>
+              <a:rPr lang="en-US" sz="1800" b="1" dirty="0">
+                <a:solidFill>
+                  <a:srgbClr val="C0392B"/>
                 </a:solidFill>
                 <a:latin typeface="Cambria" pitchFamily="34" charset="0"/>
                 <a:ea typeface="Cambria" pitchFamily="34" charset="-122"/>
                 <a:cs typeface="Cambria" pitchFamily="34" charset="-120"/>
               </a:rPr>
-              <a:t>≈25%</a:t>
-            </a:r>
-            <a:endParaRPr lang="en-US" sz="2200" dirty="0"/>
-          </a:p>
-        </p:txBody>
-      </p:sp>
-      <p:sp>
-        <p:nvSpPr>
-          <p:cNvPr id="11" name="Text 9"/>
-          <p:cNvSpPr txBox="1"/>
-          <p:nvPr/>
-        </p:nvSpPr>
-        <p:spPr>
-          <a:xfrm>
-            <a:off x="2231136" y="3191256"/>
-            <a:ext cx="3931920" cy="685800"/>
-          </a:xfrm>
-          <a:prstGeom prst="rect">
-            <a:avLst/>
-          </a:prstGeom>
-          <a:noFill/>
-          <a:ln/>
-        </p:spPr>
-        <p:txBody>
-          <a:bodyPr wrap="square" lIns="0" tIns="0" rIns="0" bIns="0" rtlCol="0" anchor="ctr"/>
-          <a:lstStyle/>
-          <a:p>
-            <a:pPr indent="0" marL="0">
-              <a:buNone/>
-            </a:pPr>
-            <a:r>
-              <a:rPr lang="en-US" sz="1300" b="1" dirty="0">
+              <a:t>Minivan / MPV</a:t>
+            </a:r>
+            <a:endParaRPr lang="en-US" sz="1800" dirty="0"/>
+          </a:p>
+        </p:txBody>
+      </p:sp>
+      <p:sp>
+        <p:nvSpPr>
+          <p:cNvPr id="12" name="Text 9"/>
+          <p:cNvSpPr txBox="1"/>
+          <p:nvPr/>
+        </p:nvSpPr>
+        <p:spPr>
+          <a:xfrm>
+            <a:off x="7955280" y="4489704"/>
+            <a:ext cx="3383280" cy="310896"/>
+          </a:xfrm>
+          <a:prstGeom prst="rect">
+            <a:avLst/>
+          </a:prstGeom>
+          <a:noFill/>
+          <a:ln/>
+        </p:spPr>
+        <p:txBody>
+          <a:bodyPr wrap="square" lIns="0" tIns="0" rIns="0" bIns="0" rtlCol="0" anchor="ctr"/>
+          <a:lstStyle/>
+          <a:p>
+            <a:pPr indent="0" marL="0">
+              <a:buNone/>
+            </a:pPr>
+            <a:r>
+              <a:rPr lang="en-US" sz="1200" b="1" dirty="0">
                 <a:solidFill>
                   <a:srgbClr val="13202B"/>
                 </a:solidFill>
@@ -5656,22 +6426,22 @@
                 <a:ea typeface="Calibri" pitchFamily="34" charset="-122"/>
                 <a:cs typeface="Calibri" pitchFamily="34" charset="-120"/>
               </a:rPr>
-              <a:t>A purchase credit restored and in effect before 2029</a:t>
-            </a:r>
-            <a:endParaRPr lang="en-US" sz="1300" dirty="0"/>
-          </a:p>
-        </p:txBody>
-      </p:sp>
-      <p:sp>
-        <p:nvSpPr>
-          <p:cNvPr id="12" name="Text 10"/>
-          <p:cNvSpPr txBox="1"/>
-          <p:nvPr/>
-        </p:nvSpPr>
-        <p:spPr>
-          <a:xfrm>
-            <a:off x="6327648" y="3191256"/>
-            <a:ext cx="5029200" cy="685800"/>
+              <a:t>None on sale for model year 2026</a:t>
+            </a:r>
+            <a:endParaRPr lang="en-US" sz="1200" dirty="0"/>
+          </a:p>
+        </p:txBody>
+      </p:sp>
+      <p:sp>
+        <p:nvSpPr>
+          <p:cNvPr id="13" name="Text 10"/>
+          <p:cNvSpPr txBox="1"/>
+          <p:nvPr/>
+        </p:nvSpPr>
+        <p:spPr>
+          <a:xfrm>
+            <a:off x="7955280" y="4828032"/>
+            <a:ext cx="3383280" cy="749808"/>
           </a:xfrm>
           <a:prstGeom prst="rect">
             <a:avLst/>
@@ -5695,7 +6465,7 @@
                 <a:ea typeface="Calibri" pitchFamily="34" charset="-122"/>
                 <a:cs typeface="Calibri" pitchFamily="34" charset="-120"/>
               </a:rPr>
-              <a:t>A flipped chamber still faces a veto. The loan-interest deduction sunsets in December 2028.</a:t>
+              <a:t>Demand-side: VW withdrew the ID.Buzz after the credit expired. China's 7-seat BYD Xia is $27,233.</a:t>
             </a:r>
             <a:endParaRPr lang="en-US" sz="1100" dirty="0"/>
           </a:p>
@@ -5703,96 +6473,30 @@
       </p:sp>
       <p:sp>
         <p:nvSpPr>
-          <p:cNvPr id="13" name="Shape 11"/>
-          <p:cNvSpPr/>
-          <p:nvPr/>
-        </p:nvSpPr>
-        <p:spPr>
-          <a:xfrm>
-            <a:off x="566928" y="4096512"/>
-            <a:ext cx="11027664" cy="923544"/>
-          </a:xfrm>
-          <a:prstGeom prst="roundRect">
-            <a:avLst>
-              <a:gd name="adj" fmla="val 5941"/>
-            </a:avLst>
-          </a:prstGeom>
-          <a:solidFill>
-            <a:srgbClr val="E9F0F4"/>
-          </a:solidFill>
-          <a:ln w="9525">
-            <a:solidFill>
-              <a:srgbClr val="D6E2E9"/>
-            </a:solidFill>
-            <a:prstDash val="solid"/>
-          </a:ln>
-        </p:spPr>
-      </p:sp>
-      <p:sp>
-        <p:nvSpPr>
-          <p:cNvPr id="14" name="Text 12"/>
-          <p:cNvSpPr txBox="1"/>
-          <p:nvPr/>
-        </p:nvSpPr>
-        <p:spPr>
-          <a:xfrm>
-            <a:off x="822960" y="4352544"/>
-            <a:ext cx="1298448" cy="438912"/>
-          </a:xfrm>
-          <a:prstGeom prst="rect">
-            <a:avLst/>
-          </a:prstGeom>
-          <a:noFill/>
-          <a:ln/>
-        </p:spPr>
-        <p:txBody>
-          <a:bodyPr wrap="square" lIns="0" tIns="0" rIns="0" bIns="0" rtlCol="0" anchor="ctr"/>
-          <a:lstStyle/>
-          <a:p>
-            <a:pPr indent="0" marL="0">
-              <a:buNone/>
-            </a:pPr>
-            <a:r>
-              <a:rPr lang="en-US" sz="2200" b="1" dirty="0">
-                <a:solidFill>
-                  <a:srgbClr val="D99A16"/>
-                </a:solidFill>
-                <a:latin typeface="Cambria" pitchFamily="34" charset="0"/>
-                <a:ea typeface="Cambria" pitchFamily="34" charset="-122"/>
-                <a:cs typeface="Cambria" pitchFamily="34" charset="-120"/>
-              </a:rPr>
-              <a:t>≈20%</a:t>
-            </a:r>
-            <a:endParaRPr lang="en-US" sz="2200" dirty="0"/>
-          </a:p>
-        </p:txBody>
-      </p:sp>
-      <p:sp>
-        <p:nvSpPr>
-          <p:cNvPr id="15" name="Text 13"/>
-          <p:cNvSpPr txBox="1"/>
-          <p:nvPr/>
-        </p:nvSpPr>
-        <p:spPr>
-          <a:xfrm>
-            <a:off x="2231136" y="4224528"/>
-            <a:ext cx="3931920" cy="685800"/>
-          </a:xfrm>
-          <a:prstGeom prst="rect">
-            <a:avLst/>
-          </a:prstGeom>
-          <a:noFill/>
-          <a:ln/>
-        </p:spPr>
-        <p:txBody>
-          <a:bodyPr wrap="square" lIns="0" tIns="0" rIns="0" bIns="0" rtlCol="0" anchor="ctr"/>
-          <a:lstStyle/>
-          <a:p>
-            <a:pPr indent="0" marL="0">
-              <a:buNone/>
-            </a:pPr>
-            <a:r>
-              <a:rPr lang="en-US" sz="1300" b="1" dirty="0">
+          <p:cNvPr id="14" name="Text 11"/>
+          <p:cNvSpPr txBox="1"/>
+          <p:nvPr/>
+        </p:nvSpPr>
+        <p:spPr>
+          <a:xfrm>
+            <a:off x="566928" y="5815584"/>
+            <a:ext cx="11027664" cy="457200"/>
+          </a:xfrm>
+          <a:prstGeom prst="rect">
+            <a:avLst/>
+          </a:prstGeom>
+          <a:noFill/>
+          <a:ln/>
+        </p:spPr>
+        <p:txBody>
+          <a:bodyPr wrap="square" lIns="0" tIns="0" rIns="0" bIns="0" rtlCol="0" anchor="ctr"/>
+          <a:lstStyle/>
+          <a:p>
+            <a:pPr indent="0" marL="0">
+              <a:buNone/>
+            </a:pPr>
+            <a:r>
+              <a:rPr lang="en-US" sz="1250" i="1" dirty="0">
                 <a:solidFill>
                   <a:srgbClr val="13202B"/>
                 </a:solidFill>
@@ -5800,38 +6504,38 @@
                 <a:ea typeface="Calibri" pitchFamily="34" charset="-122"/>
                 <a:cs typeface="Calibri" pitchFamily="34" charset="-120"/>
               </a:rPr>
-              <a:t>A U.S. EV price floor below $25,000 before 2030</a:t>
-            </a:r>
-            <a:endParaRPr lang="en-US" sz="1300" dirty="0"/>
-          </a:p>
-        </p:txBody>
-      </p:sp>
-      <p:sp>
-        <p:nvSpPr>
-          <p:cNvPr id="16" name="Text 14"/>
-          <p:cNvSpPr txBox="1"/>
-          <p:nvPr/>
-        </p:nvSpPr>
-        <p:spPr>
-          <a:xfrm>
-            <a:off x="6327648" y="4224528"/>
-            <a:ext cx="5029200" cy="685800"/>
-          </a:xfrm>
-          <a:prstGeom prst="rect">
-            <a:avLst/>
-          </a:prstGeom>
-          <a:noFill/>
-          <a:ln/>
-        </p:spPr>
-        <p:txBody>
-          <a:bodyPr wrap="square" lIns="0" tIns="0" rIns="0" bIns="0" rtlCol="0" anchor="ctr"/>
-          <a:lstStyle/>
-          <a:p>
-            <a:pPr indent="0" marL="0">
-              <a:buNone/>
-            </a:pPr>
-            <a:r>
-              <a:rPr lang="en-US" sz="1100" dirty="0">
+              <a:t>Each policy produced a missing segment by a different mechanism — the clearest sign they are two separate forces pushing the same way, not one story told twice.</a:t>
+            </a:r>
+            <a:endParaRPr lang="en-US" sz="1250" dirty="0"/>
+          </a:p>
+        </p:txBody>
+      </p:sp>
+      <p:sp>
+        <p:nvSpPr>
+          <p:cNvPr id="15" name="Text 12"/>
+          <p:cNvSpPr txBox="1"/>
+          <p:nvPr/>
+        </p:nvSpPr>
+        <p:spPr>
+          <a:xfrm>
+            <a:off x="566928" y="6327648"/>
+            <a:ext cx="11027664" cy="237744"/>
+          </a:xfrm>
+          <a:prstGeom prst="rect">
+            <a:avLst/>
+          </a:prstGeom>
+          <a:noFill/>
+          <a:ln/>
+        </p:spPr>
+        <p:txBody>
+          <a:bodyPr wrap="square" lIns="0" tIns="0" rIns="0" bIns="0" rtlCol="0" anchor="ctr"/>
+          <a:lstStyle/>
+          <a:p>
+            <a:pPr indent="0" marL="0">
+              <a:buNone/>
+            </a:pPr>
+            <a:r>
+              <a:rPr lang="en-US" sz="900" i="1" dirty="0">
                 <a:solidFill>
                   <a:srgbClr val="5A6E7C"/>
                 </a:solidFill>
@@ -5839,192 +6543,9 @@
                 <a:ea typeface="Calibri" pitchFamily="34" charset="-122"/>
                 <a:cs typeface="Calibri" pitchFamily="34" charset="-120"/>
               </a:rPr>
-              <a:t>Ford's $30,000 pickup arrives in 2027 on LFP cells. Platform economics reach $30k, not $22k.</a:t>
-            </a:r>
-            <a:endParaRPr lang="en-US" sz="1100" dirty="0"/>
-          </a:p>
-        </p:txBody>
-      </p:sp>
-      <p:sp>
-        <p:nvSpPr>
-          <p:cNvPr id="17" name="Shape 15"/>
-          <p:cNvSpPr/>
-          <p:nvPr/>
-        </p:nvSpPr>
-        <p:spPr>
-          <a:xfrm>
-            <a:off x="566928" y="5129784"/>
-            <a:ext cx="11027664" cy="923544"/>
-          </a:xfrm>
-          <a:prstGeom prst="roundRect">
-            <a:avLst>
-              <a:gd name="adj" fmla="val 5941"/>
-            </a:avLst>
-          </a:prstGeom>
-          <a:solidFill>
-            <a:srgbClr val="E9F0F4"/>
-          </a:solidFill>
-          <a:ln w="9525">
-            <a:solidFill>
-              <a:srgbClr val="D6E2E9"/>
-            </a:solidFill>
-            <a:prstDash val="solid"/>
-          </a:ln>
-        </p:spPr>
-      </p:sp>
-      <p:sp>
-        <p:nvSpPr>
-          <p:cNvPr id="18" name="Text 16"/>
-          <p:cNvSpPr txBox="1"/>
-          <p:nvPr/>
-        </p:nvSpPr>
-        <p:spPr>
-          <a:xfrm>
-            <a:off x="822960" y="5385816"/>
-            <a:ext cx="1298448" cy="438912"/>
-          </a:xfrm>
-          <a:prstGeom prst="rect">
-            <a:avLst/>
-          </a:prstGeom>
-          <a:noFill/>
-          <a:ln/>
-        </p:spPr>
-        <p:txBody>
-          <a:bodyPr wrap="square" lIns="0" tIns="0" rIns="0" bIns="0" rtlCol="0" anchor="ctr"/>
-          <a:lstStyle/>
-          <a:p>
-            <a:pPr indent="0" marL="0">
-              <a:buNone/>
-            </a:pPr>
-            <a:r>
-              <a:rPr lang="en-US" sz="2200" b="1" dirty="0">
-                <a:solidFill>
-                  <a:srgbClr val="3081AE"/>
-                </a:solidFill>
-                <a:latin typeface="Cambria" pitchFamily="34" charset="0"/>
-                <a:ea typeface="Cambria" pitchFamily="34" charset="-122"/>
-                <a:cs typeface="Cambria" pitchFamily="34" charset="-120"/>
-              </a:rPr>
-              <a:t>6–10%</a:t>
-            </a:r>
-            <a:endParaRPr lang="en-US" sz="2200" dirty="0"/>
-          </a:p>
-        </p:txBody>
-      </p:sp>
-      <p:sp>
-        <p:nvSpPr>
-          <p:cNvPr id="19" name="Text 17"/>
-          <p:cNvSpPr txBox="1"/>
-          <p:nvPr/>
-        </p:nvSpPr>
-        <p:spPr>
-          <a:xfrm>
-            <a:off x="2231136" y="5257800"/>
-            <a:ext cx="3931920" cy="685800"/>
-          </a:xfrm>
-          <a:prstGeom prst="rect">
-            <a:avLst/>
-          </a:prstGeom>
-          <a:noFill/>
-          <a:ln/>
-        </p:spPr>
-        <p:txBody>
-          <a:bodyPr wrap="square" lIns="0" tIns="0" rIns="0" bIns="0" rtlCol="0" anchor="ctr"/>
-          <a:lstStyle/>
-          <a:p>
-            <a:pPr indent="0" marL="0">
-              <a:buNone/>
-            </a:pPr>
-            <a:r>
-              <a:rPr lang="en-US" sz="1300" b="1" dirty="0">
-                <a:solidFill>
-                  <a:srgbClr val="13202B"/>
-                </a:solidFill>
-                <a:latin typeface="Calibri" pitchFamily="34" charset="0"/>
-                <a:ea typeface="Calibri" pitchFamily="34" charset="-122"/>
-                <a:cs typeface="Calibri" pitchFamily="34" charset="-120"/>
-              </a:rPr>
-              <a:t>BEV share range through 2030</a:t>
-            </a:r>
-            <a:endParaRPr lang="en-US" sz="1300" dirty="0"/>
-          </a:p>
-        </p:txBody>
-      </p:sp>
-      <p:sp>
-        <p:nvSpPr>
-          <p:cNvPr id="20" name="Text 18"/>
-          <p:cNvSpPr txBox="1"/>
-          <p:nvPr/>
-        </p:nvSpPr>
-        <p:spPr>
-          <a:xfrm>
-            <a:off x="6327648" y="5257800"/>
-            <a:ext cx="5029200" cy="685800"/>
-          </a:xfrm>
-          <a:prstGeom prst="rect">
-            <a:avLst/>
-          </a:prstGeom>
-          <a:noFill/>
-          <a:ln/>
-        </p:spPr>
-        <p:txBody>
-          <a:bodyPr wrap="square" lIns="0" tIns="0" rIns="0" bIns="0" rtlCol="0" anchor="ctr"/>
-          <a:lstStyle/>
-          <a:p>
-            <a:pPr indent="0" marL="0">
-              <a:buNone/>
-            </a:pPr>
-            <a:r>
-              <a:rPr lang="en-US" sz="1100" dirty="0">
-                <a:solidFill>
-                  <a:srgbClr val="5A6E7C"/>
-                </a:solidFill>
-                <a:latin typeface="Calibri" pitchFamily="34" charset="0"/>
-                <a:ea typeface="Calibri" pitchFamily="34" charset="-122"/>
-                <a:cs typeface="Calibri" pitchFamily="34" charset="-120"/>
-              </a:rPr>
-              <a:t>Against 22%+ in Europe. Expect divergence, not recovery.</a:t>
-            </a:r>
-            <a:endParaRPr lang="en-US" sz="1100" dirty="0"/>
-          </a:p>
-        </p:txBody>
-      </p:sp>
-      <p:sp>
-        <p:nvSpPr>
-          <p:cNvPr id="21" name="Text 19"/>
-          <p:cNvSpPr txBox="1"/>
-          <p:nvPr/>
-        </p:nvSpPr>
-        <p:spPr>
-          <a:xfrm>
-            <a:off x="566928" y="6272784"/>
-            <a:ext cx="11027664" cy="475488"/>
-          </a:xfrm>
-          <a:prstGeom prst="rect">
-            <a:avLst/>
-          </a:prstGeom>
-          <a:noFill/>
-          <a:ln/>
-        </p:spPr>
-        <p:txBody>
-          <a:bodyPr wrap="square" lIns="0" tIns="0" rIns="0" bIns="0" rtlCol="0" anchor="ctr"/>
-          <a:lstStyle/>
-          <a:p>
-            <a:pPr indent="0" marL="0">
-              <a:buNone/>
-            </a:pPr>
-            <a:r>
-              <a:rPr lang="en-US" sz="1200" i="1" dirty="0">
-                <a:solidFill>
-                  <a:srgbClr val="13202B"/>
-                </a:solidFill>
-                <a:latin typeface="Calibri" pitchFamily="34" charset="0"/>
-                <a:ea typeface="Calibri" pitchFamily="34" charset="-122"/>
-                <a:cs typeface="Calibri" pitchFamily="34" charset="-120"/>
-              </a:rPr>
-              <a:t>The underweighted change: the EPA repealed the 2009 endangerment finding in February 2026, on top of the December 2025 CAFE rollback. Automakers no longer have a compliance reason to build EVs at all — structurally larger than the lost subsidy.</a:t>
-            </a:r>
-            <a:endParaRPr lang="en-US" sz="1200" dirty="0"/>
+              <a:t>Edmunds · iSeeCars · Cars.com · CnEVPost · manufacturer listings, Sept 2026</a:t>
+            </a:r>
+            <a:endParaRPr lang="en-US" sz="900" dirty="0"/>
           </a:p>
         </p:txBody>
       </p:sp>
@@ -6039,6 +6560,1232 @@
 <file path=ppt/slides/slide13.xml><?xml version="1.0" encoding="utf-8"?>
 <p:sld xmlns:a="http://schemas.openxmlformats.org/drawingml/2006/main" xmlns:r="http://schemas.openxmlformats.org/officeDocument/2006/relationships" xmlns:p="http://schemas.openxmlformats.org/presentationml/2006/main">
   <p:cSld name="Slide 13">
+    <p:spTree>
+      <p:nvGrpSpPr>
+        <p:cNvPr id="1" name=""/>
+        <p:cNvGrpSpPr/>
+        <p:nvPr/>
+      </p:nvGrpSpPr>
+      <p:grpSpPr>
+        <a:xfrm>
+          <a:off x="0" y="0"/>
+          <a:ext cx="0" cy="0"/>
+          <a:chOff x="0" y="0"/>
+          <a:chExt cx="0" cy="0"/>
+        </a:xfrm>
+      </p:grpSpPr>
+      <p:sp>
+        <p:nvSpPr>
+          <p:cNvPr id="2" name="Text 0"/>
+          <p:cNvSpPr txBox="1"/>
+          <p:nvPr/>
+        </p:nvSpPr>
+        <p:spPr>
+          <a:xfrm>
+            <a:off x="566928" y="384048"/>
+            <a:ext cx="11027664" cy="219456"/>
+          </a:xfrm>
+          <a:prstGeom prst="rect">
+            <a:avLst/>
+          </a:prstGeom>
+          <a:noFill/>
+          <a:ln/>
+        </p:spPr>
+        <p:txBody>
+          <a:bodyPr wrap="square" lIns="0" tIns="0" rIns="0" bIns="0" rtlCol="0" anchor="ctr"/>
+          <a:lstStyle/>
+          <a:p>
+            <a:pPr indent="0" marL="0">
+              <a:buNone/>
+            </a:pPr>
+            <a:r>
+              <a:rPr lang="en-US" sz="1100" b="1" spc="200" kern="0" dirty="0">
+                <a:solidFill>
+                  <a:srgbClr val="3081AE"/>
+                </a:solidFill>
+                <a:latin typeface="Calibri" pitchFamily="34" charset="0"/>
+                <a:ea typeface="Calibri" pitchFamily="34" charset="-122"/>
+                <a:cs typeface="Calibri" pitchFamily="34" charset="-120"/>
+              </a:rPr>
+              <a:t>BY POWERTRAIN</a:t>
+            </a:r>
+            <a:endParaRPr lang="en-US" sz="1100" dirty="0"/>
+          </a:p>
+        </p:txBody>
+      </p:sp>
+      <p:sp>
+        <p:nvSpPr>
+          <p:cNvPr id="3" name="Text 1"/>
+          <p:cNvSpPr txBox="1"/>
+          <p:nvPr/>
+        </p:nvSpPr>
+        <p:spPr>
+          <a:xfrm>
+            <a:off x="566928" y="640080"/>
+            <a:ext cx="11027664" cy="658368"/>
+          </a:xfrm>
+          <a:prstGeom prst="rect">
+            <a:avLst/>
+          </a:prstGeom>
+          <a:noFill/>
+          <a:ln/>
+        </p:spPr>
+        <p:txBody>
+          <a:bodyPr wrap="square" lIns="0" tIns="0" rIns="0" bIns="0" rtlCol="0" anchor="ctr"/>
+          <a:lstStyle/>
+          <a:p>
+            <a:pPr indent="0" marL="0">
+              <a:buNone/>
+            </a:pPr>
+            <a:r>
+              <a:rPr lang="en-US" sz="2900" b="1" dirty="0">
+                <a:solidFill>
+                  <a:srgbClr val="13202B"/>
+                </a:solidFill>
+                <a:latin typeface="Cambria" pitchFamily="34" charset="0"/>
+                <a:ea typeface="Cambria" pitchFamily="34" charset="-122"/>
+                <a:cs typeface="Cambria" pitchFamily="34" charset="-120"/>
+              </a:rPr>
+              <a:t>The subsidy was removed from one powertrain and not the other</a:t>
+            </a:r>
+            <a:endParaRPr lang="en-US" sz="2900" dirty="0"/>
+          </a:p>
+        </p:txBody>
+      </p:sp>
+      <p:sp>
+        <p:nvSpPr>
+          <p:cNvPr id="4" name="Text 2"/>
+          <p:cNvSpPr txBox="1"/>
+          <p:nvPr/>
+        </p:nvSpPr>
+        <p:spPr>
+          <a:xfrm>
+            <a:off x="566928" y="1316736"/>
+            <a:ext cx="10844784" cy="384048"/>
+          </a:xfrm>
+          <a:prstGeom prst="rect">
+            <a:avLst/>
+          </a:prstGeom>
+          <a:noFill/>
+          <a:ln/>
+        </p:spPr>
+        <p:txBody>
+          <a:bodyPr wrap="square" lIns="0" tIns="0" rIns="0" bIns="0" rtlCol="0" anchor="ctr"/>
+          <a:lstStyle/>
+          <a:p>
+            <a:pPr indent="0" marL="0">
+              <a:buNone/>
+            </a:pPr>
+            <a:r>
+              <a:rPr lang="en-US" sz="1400" dirty="0">
+                <a:solidFill>
+                  <a:srgbClr val="5A6E7C"/>
+                </a:solidFill>
+                <a:latin typeface="Calibri" pitchFamily="34" charset="0"/>
+                <a:ea typeface="Calibri" pitchFamily="34" charset="-122"/>
+                <a:cs typeface="Calibri" pitchFamily="34" charset="-120"/>
+              </a:rPr>
+              <a:t>What an American pays to move off gasoline, same nameplate, same dealer.</a:t>
+            </a:r>
+            <a:endParaRPr lang="en-US" sz="1400" dirty="0"/>
+          </a:p>
+        </p:txBody>
+      </p:sp>
+      <p:graphicFrame>
+        <p:nvGraphicFramePr>
+          <p:cNvPr id="5" name="Chart 0" descr=""/>
+          <p:cNvGraphicFramePr/>
+          <p:nvPr/>
+        </p:nvGraphicFramePr>
+        <p:xfrm>
+          <a:off x="566928" y="2139696"/>
+          <a:ext cx="6858000" cy="3566160"/>
+        </p:xfrm>
+        <a:graphic xmlns:a="http://schemas.openxmlformats.org/drawingml/2006/main">
+          <a:graphicData uri="http://schemas.openxmlformats.org/drawingml/2006/chart">
+            <c:chart xmlns:c="http://schemas.openxmlformats.org/drawingml/2006/chart" r:id="rId1"/>
+          </a:graphicData>
+        </a:graphic>
+      </p:graphicFrame>
+      <p:sp>
+        <p:nvSpPr>
+          <p:cNvPr id="6" name="Shape 3"/>
+          <p:cNvSpPr/>
+          <p:nvPr/>
+        </p:nvSpPr>
+        <p:spPr>
+          <a:xfrm>
+            <a:off x="7699248" y="2139696"/>
+            <a:ext cx="3895344" cy="1572768"/>
+          </a:xfrm>
+          <a:prstGeom prst="roundRect">
+            <a:avLst>
+              <a:gd name="adj" fmla="val 3488"/>
+            </a:avLst>
+          </a:prstGeom>
+          <a:solidFill>
+            <a:srgbClr val="0E2A3A"/>
+          </a:solidFill>
+          <a:ln w="9525">
+            <a:solidFill>
+              <a:srgbClr val="D6E2E9"/>
+            </a:solidFill>
+            <a:prstDash val="solid"/>
+          </a:ln>
+        </p:spPr>
+      </p:sp>
+      <p:sp>
+        <p:nvSpPr>
+          <p:cNvPr id="7" name="Text 4"/>
+          <p:cNvSpPr txBox="1"/>
+          <p:nvPr/>
+        </p:nvSpPr>
+        <p:spPr>
+          <a:xfrm>
+            <a:off x="7955280" y="2322576"/>
+            <a:ext cx="3383280" cy="658368"/>
+          </a:xfrm>
+          <a:prstGeom prst="rect">
+            <a:avLst/>
+          </a:prstGeom>
+          <a:noFill/>
+          <a:ln/>
+        </p:spPr>
+        <p:txBody>
+          <a:bodyPr wrap="square" lIns="0" tIns="0" rIns="0" bIns="0" rtlCol="0" anchor="ctr"/>
+          <a:lstStyle/>
+          <a:p>
+            <a:pPr indent="0" marL="0">
+              <a:buNone/>
+            </a:pPr>
+            <a:r>
+              <a:rPr lang="en-US" sz="1700" b="1" dirty="0">
+                <a:solidFill>
+                  <a:srgbClr val="FFFFFF"/>
+                </a:solidFill>
+                <a:latin typeface="Cambria" pitchFamily="34" charset="0"/>
+                <a:ea typeface="Cambria" pitchFamily="34" charset="-122"/>
+                <a:cs typeface="Cambria" pitchFamily="34" charset="-120"/>
+              </a:rPr>
+              <a:t>Toyota no longer sells a gasoline RAV4 or Camry.</a:t>
+            </a:r>
+            <a:endParaRPr lang="en-US" sz="1700" dirty="0"/>
+          </a:p>
+        </p:txBody>
+      </p:sp>
+      <p:sp>
+        <p:nvSpPr>
+          <p:cNvPr id="8" name="Text 5"/>
+          <p:cNvSpPr txBox="1"/>
+          <p:nvPr/>
+        </p:nvSpPr>
+        <p:spPr>
+          <a:xfrm>
+            <a:off x="7955280" y="2980944"/>
+            <a:ext cx="3383280" cy="566928"/>
+          </a:xfrm>
+          <a:prstGeom prst="rect">
+            <a:avLst/>
+          </a:prstGeom>
+          <a:noFill/>
+          <a:ln/>
+        </p:spPr>
+        <p:txBody>
+          <a:bodyPr wrap="square" lIns="0" tIns="0" rIns="0" bIns="0" rtlCol="0" anchor="ctr"/>
+          <a:lstStyle/>
+          <a:p>
+            <a:pPr indent="0" marL="0">
+              <a:buNone/>
+            </a:pPr>
+            <a:r>
+              <a:rPr lang="en-US" sz="1150" dirty="0">
+                <a:solidFill>
+                  <a:srgbClr val="BCD3E0"/>
+                </a:solidFill>
+                <a:latin typeface="Calibri" pitchFamily="34" charset="0"/>
+                <a:ea typeface="Calibri" pitchFamily="34" charset="-122"/>
+                <a:cs typeface="Calibri" pitchFamily="34" charset="-120"/>
+              </a:rPr>
+              <a:t>For 2026 every one is a hybrid. America's default powertrain has already left pure gasoline.</a:t>
+            </a:r>
+            <a:endParaRPr lang="en-US" sz="1150" dirty="0"/>
+          </a:p>
+        </p:txBody>
+      </p:sp>
+      <p:sp>
+        <p:nvSpPr>
+          <p:cNvPr id="9" name="Shape 6"/>
+          <p:cNvSpPr/>
+          <p:nvPr/>
+        </p:nvSpPr>
+        <p:spPr>
+          <a:xfrm>
+            <a:off x="7699248" y="3858768"/>
+            <a:ext cx="3895344" cy="1847088"/>
+          </a:xfrm>
+          <a:prstGeom prst="roundRect">
+            <a:avLst>
+              <a:gd name="adj" fmla="val 2970"/>
+            </a:avLst>
+          </a:prstGeom>
+          <a:solidFill>
+            <a:srgbClr val="E9F0F4"/>
+          </a:solidFill>
+          <a:ln w="9525">
+            <a:solidFill>
+              <a:srgbClr val="D6E2E9"/>
+            </a:solidFill>
+            <a:prstDash val="solid"/>
+          </a:ln>
+        </p:spPr>
+      </p:sp>
+      <p:sp>
+        <p:nvSpPr>
+          <p:cNvPr id="10" name="Text 7"/>
+          <p:cNvSpPr txBox="1"/>
+          <p:nvPr/>
+        </p:nvSpPr>
+        <p:spPr>
+          <a:xfrm>
+            <a:off x="7955280" y="4005072"/>
+            <a:ext cx="3383280" cy="402336"/>
+          </a:xfrm>
+          <a:prstGeom prst="rect">
+            <a:avLst/>
+          </a:prstGeom>
+          <a:noFill/>
+          <a:ln/>
+        </p:spPr>
+        <p:txBody>
+          <a:bodyPr wrap="square" lIns="0" tIns="0" rIns="0" bIns="0" rtlCol="0" anchor="ctr"/>
+          <a:lstStyle/>
+          <a:p>
+            <a:pPr indent="0" marL="0">
+              <a:buNone/>
+            </a:pPr>
+            <a:r>
+              <a:rPr lang="en-US" sz="1600" b="1" dirty="0">
+                <a:solidFill>
+                  <a:srgbClr val="13202B"/>
+                </a:solidFill>
+                <a:latin typeface="Cambria" pitchFamily="34" charset="0"/>
+                <a:ea typeface="Cambria" pitchFamily="34" charset="-122"/>
+                <a:cs typeface="Cambria" pitchFamily="34" charset="-120"/>
+              </a:rPr>
+              <a:t>It just moved to hybrid, not electric</a:t>
+            </a:r>
+            <a:endParaRPr lang="en-US" sz="1600" dirty="0"/>
+          </a:p>
+        </p:txBody>
+      </p:sp>
+      <p:sp>
+        <p:nvSpPr>
+          <p:cNvPr id="11" name="Text 8"/>
+          <p:cNvSpPr txBox="1"/>
+          <p:nvPr/>
+        </p:nvSpPr>
+        <p:spPr>
+          <a:xfrm>
+            <a:off x="7955280" y="4425696"/>
+            <a:ext cx="3401568" cy="1170432"/>
+          </a:xfrm>
+          <a:prstGeom prst="rect">
+            <a:avLst/>
+          </a:prstGeom>
+          <a:noFill/>
+          <a:ln/>
+        </p:spPr>
+        <p:txBody>
+          <a:bodyPr wrap="square" lIns="0" tIns="0" rIns="0" bIns="0" rtlCol="0" anchor="ctr"/>
+          <a:lstStyle/>
+          <a:p>
+            <a:pPr indent="0" marL="0">
+              <a:buNone/>
+            </a:pPr>
+            <a:r>
+              <a:rPr lang="en-US" sz="1050" dirty="0">
+                <a:solidFill>
+                  <a:srgbClr val="13202B"/>
+                </a:solidFill>
+                <a:latin typeface="Calibri" pitchFamily="34" charset="0"/>
+                <a:ea typeface="Calibri" pitchFamily="34" charset="-122"/>
+                <a:cs typeface="Calibri" pitchFamily="34" charset="-120"/>
+              </a:rPr>
+              <a:t>A hybrid costs ~$4,700 over gasoline and never needed a subsidy. A BEV costs ~$6,500 and lost the $7,500 that closed the gap.</a:t>
+            </a:r>
+            <a:endParaRPr lang="en-US" sz="1050" dirty="0"/>
+          </a:p>
+          <a:p>
+            <a:pPr indent="0" marL="0">
+              <a:buNone/>
+            </a:pPr>
+            <a:endParaRPr lang="en-US" sz="1050" dirty="0"/>
+          </a:p>
+          <a:p>
+            <a:pPr indent="0" marL="0">
+              <a:buNone/>
+            </a:pPr>
+            <a:r>
+              <a:rPr lang="en-US" sz="1050" dirty="0">
+                <a:solidFill>
+                  <a:srgbClr val="13202B"/>
+                </a:solidFill>
+                <a:latin typeface="Calibri" pitchFamily="34" charset="0"/>
+                <a:ea typeface="Calibri" pitchFamily="34" charset="-122"/>
+                <a:cs typeface="Calibri" pitchFamily="34" charset="-120"/>
+              </a:rPr>
+              <a:t>Mexico shows the destination: 69% of its electrified sales are hybrids, against 14.5% battery-electric.</a:t>
+            </a:r>
+            <a:endParaRPr lang="en-US" sz="1050" dirty="0"/>
+          </a:p>
+        </p:txBody>
+      </p:sp>
+      <p:sp>
+        <p:nvSpPr>
+          <p:cNvPr id="12" name="Text 9"/>
+          <p:cNvSpPr txBox="1"/>
+          <p:nvPr/>
+        </p:nvSpPr>
+        <p:spPr>
+          <a:xfrm>
+            <a:off x="566928" y="5815584"/>
+            <a:ext cx="11027664" cy="457200"/>
+          </a:xfrm>
+          <a:prstGeom prst="rect">
+            <a:avLst/>
+          </a:prstGeom>
+          <a:noFill/>
+          <a:ln/>
+        </p:spPr>
+        <p:txBody>
+          <a:bodyPr wrap="square" lIns="0" tIns="0" rIns="0" bIns="0" rtlCol="0" anchor="ctr"/>
+          <a:lstStyle/>
+          <a:p>
+            <a:pPr indent="0" marL="0">
+              <a:buNone/>
+            </a:pPr>
+            <a:r>
+              <a:rPr lang="en-US" sz="1100" dirty="0">
+                <a:solidFill>
+                  <a:srgbClr val="5A6E7C"/>
+                </a:solidFill>
+                <a:latin typeface="Calibri" pitchFamily="34" charset="0"/>
+                <a:ea typeface="Calibri" pitchFamily="34" charset="-122"/>
+                <a:cs typeface="Calibri" pitchFamily="34" charset="-120"/>
+              </a:rPr>
+              <a:t>Chevrolet Equinox gasoline $29,995 vs Equinox EV $36,495 · Honda CR-V $32,370 vs CR-V Hybrid $37,080 · Toyota RAV4 hybrid $33,350, PHEV $42,920</a:t>
+            </a:r>
+            <a:endParaRPr lang="en-US" sz="1100" dirty="0"/>
+          </a:p>
+        </p:txBody>
+      </p:sp>
+      <p:sp>
+        <p:nvSpPr>
+          <p:cNvPr id="13" name="Text 10"/>
+          <p:cNvSpPr txBox="1"/>
+          <p:nvPr/>
+        </p:nvSpPr>
+        <p:spPr>
+          <a:xfrm>
+            <a:off x="566928" y="6327648"/>
+            <a:ext cx="11027664" cy="237744"/>
+          </a:xfrm>
+          <a:prstGeom prst="rect">
+            <a:avLst/>
+          </a:prstGeom>
+          <a:noFill/>
+          <a:ln/>
+        </p:spPr>
+        <p:txBody>
+          <a:bodyPr wrap="square" lIns="0" tIns="0" rIns="0" bIns="0" rtlCol="0" anchor="ctr"/>
+          <a:lstStyle/>
+          <a:p>
+            <a:pPr indent="0" marL="0">
+              <a:buNone/>
+            </a:pPr>
+            <a:r>
+              <a:rPr lang="en-US" sz="900" i="1" dirty="0">
+                <a:solidFill>
+                  <a:srgbClr val="5A6E7C"/>
+                </a:solidFill>
+                <a:latin typeface="Calibri" pitchFamily="34" charset="0"/>
+                <a:ea typeface="Calibri" pitchFamily="34" charset="-122"/>
+                <a:cs typeface="Calibri" pitchFamily="34" charset="-120"/>
+              </a:rPr>
+              <a:t>Edmunds · TrueCar · Motor1 · Cars.com · AMIA Mexico, Sept 2026</a:t>
+            </a:r>
+            <a:endParaRPr lang="en-US" sz="900" dirty="0"/>
+          </a:p>
+        </p:txBody>
+      </p:sp>
+    </p:spTree>
+  </p:cSld>
+  <p:clrMapOvr>
+    <a:masterClrMapping/>
+  </p:clrMapOvr>
+</p:sld>
+</file>
+
+<file path=ppt/slides/slide14.xml><?xml version="1.0" encoding="utf-8"?>
+<p:sld xmlns:a="http://schemas.openxmlformats.org/drawingml/2006/main" xmlns:r="http://schemas.openxmlformats.org/officeDocument/2006/relationships" xmlns:p="http://schemas.openxmlformats.org/presentationml/2006/main">
+  <p:cSld name="Slide 14">
+    <p:spTree>
+      <p:nvGrpSpPr>
+        <p:cNvPr id="1" name=""/>
+        <p:cNvGrpSpPr/>
+        <p:nvPr/>
+      </p:nvGrpSpPr>
+      <p:grpSpPr>
+        <a:xfrm>
+          <a:off x="0" y="0"/>
+          <a:ext cx="0" cy="0"/>
+          <a:chOff x="0" y="0"/>
+          <a:chExt cx="0" cy="0"/>
+        </a:xfrm>
+      </p:grpSpPr>
+      <p:sp>
+        <p:nvSpPr>
+          <p:cNvPr id="2" name="Text 0"/>
+          <p:cNvSpPr txBox="1"/>
+          <p:nvPr/>
+        </p:nvSpPr>
+        <p:spPr>
+          <a:xfrm>
+            <a:off x="566928" y="384048"/>
+            <a:ext cx="11027664" cy="219456"/>
+          </a:xfrm>
+          <a:prstGeom prst="rect">
+            <a:avLst/>
+          </a:prstGeom>
+          <a:noFill/>
+          <a:ln/>
+        </p:spPr>
+        <p:txBody>
+          <a:bodyPr wrap="square" lIns="0" tIns="0" rIns="0" bIns="0" rtlCol="0" anchor="ctr"/>
+          <a:lstStyle/>
+          <a:p>
+            <a:pPr indent="0" marL="0">
+              <a:buNone/>
+            </a:pPr>
+            <a:r>
+              <a:rPr lang="en-US" sz="1100" b="1" spc="200" kern="0" dirty="0">
+                <a:solidFill>
+                  <a:srgbClr val="3081AE"/>
+                </a:solidFill>
+                <a:latin typeface="Calibri" pitchFamily="34" charset="0"/>
+                <a:ea typeface="Calibri" pitchFamily="34" charset="-122"/>
+                <a:cs typeface="Calibri" pitchFamily="34" charset="-120"/>
+              </a:rPr>
+              <a:t>OUTLOOK</a:t>
+            </a:r>
+            <a:endParaRPr lang="en-US" sz="1100" dirty="0"/>
+          </a:p>
+        </p:txBody>
+      </p:sp>
+      <p:sp>
+        <p:nvSpPr>
+          <p:cNvPr id="3" name="Text 1"/>
+          <p:cNvSpPr txBox="1"/>
+          <p:nvPr/>
+        </p:nvSpPr>
+        <p:spPr>
+          <a:xfrm>
+            <a:off x="566928" y="640080"/>
+            <a:ext cx="11027664" cy="658368"/>
+          </a:xfrm>
+          <a:prstGeom prst="rect">
+            <a:avLst/>
+          </a:prstGeom>
+          <a:noFill/>
+          <a:ln/>
+        </p:spPr>
+        <p:txBody>
+          <a:bodyPr wrap="square" lIns="0" tIns="0" rIns="0" bIns="0" rtlCol="0" anchor="ctr"/>
+          <a:lstStyle/>
+          <a:p>
+            <a:pPr indent="0" marL="0">
+              <a:buNone/>
+            </a:pPr>
+            <a:r>
+              <a:rPr lang="en-US" sz="2900" b="1" dirty="0">
+                <a:solidFill>
+                  <a:srgbClr val="13202B"/>
+                </a:solidFill>
+                <a:latin typeface="Cambria" pitchFamily="34" charset="0"/>
+                <a:ea typeface="Cambria" pitchFamily="34" charset="-122"/>
+                <a:cs typeface="Cambria" pitchFamily="34" charset="-120"/>
+              </a:rPr>
+              <a:t>What to expect through 2030</a:t>
+            </a:r>
+            <a:endParaRPr lang="en-US" sz="2900" dirty="0"/>
+          </a:p>
+        </p:txBody>
+      </p:sp>
+      <p:sp>
+        <p:nvSpPr>
+          <p:cNvPr id="4" name="Text 2"/>
+          <p:cNvSpPr txBox="1"/>
+          <p:nvPr/>
+        </p:nvSpPr>
+        <p:spPr>
+          <a:xfrm>
+            <a:off x="566928" y="1316736"/>
+            <a:ext cx="10844784" cy="384048"/>
+          </a:xfrm>
+          <a:prstGeom prst="rect">
+            <a:avLst/>
+          </a:prstGeom>
+          <a:noFill/>
+          <a:ln/>
+        </p:spPr>
+        <p:txBody>
+          <a:bodyPr wrap="square" lIns="0" tIns="0" rIns="0" bIns="0" rtlCol="0" anchor="ctr"/>
+          <a:lstStyle/>
+          <a:p>
+            <a:pPr indent="0" marL="0">
+              <a:buNone/>
+            </a:pPr>
+            <a:r>
+              <a:rPr lang="en-US" sz="1400" dirty="0">
+                <a:solidFill>
+                  <a:srgbClr val="5A6E7C"/>
+                </a:solidFill>
+                <a:latin typeface="Calibri" pitchFamily="34" charset="0"/>
+                <a:ea typeface="Calibri" pitchFamily="34" charset="-122"/>
+                <a:cs typeface="Calibri" pitchFamily="34" charset="-120"/>
+              </a:rPr>
+              <a:t>Two changes since the analysis was drafted matter more than anything on a watch list.</a:t>
+            </a:r>
+            <a:endParaRPr lang="en-US" sz="1400" dirty="0"/>
+          </a:p>
+        </p:txBody>
+      </p:sp>
+      <p:sp>
+        <p:nvSpPr>
+          <p:cNvPr id="5" name="Shape 3"/>
+          <p:cNvSpPr/>
+          <p:nvPr/>
+        </p:nvSpPr>
+        <p:spPr>
+          <a:xfrm>
+            <a:off x="566928" y="2029968"/>
+            <a:ext cx="11027664" cy="923544"/>
+          </a:xfrm>
+          <a:prstGeom prst="roundRect">
+            <a:avLst>
+              <a:gd name="adj" fmla="val 5941"/>
+            </a:avLst>
+          </a:prstGeom>
+          <a:solidFill>
+            <a:srgbClr val="E9F0F4"/>
+          </a:solidFill>
+          <a:ln w="9525">
+            <a:solidFill>
+              <a:srgbClr val="D6E2E9"/>
+            </a:solidFill>
+            <a:prstDash val="solid"/>
+          </a:ln>
+        </p:spPr>
+      </p:sp>
+      <p:sp>
+        <p:nvSpPr>
+          <p:cNvPr id="6" name="Text 4"/>
+          <p:cNvSpPr txBox="1"/>
+          <p:nvPr/>
+        </p:nvSpPr>
+        <p:spPr>
+          <a:xfrm>
+            <a:off x="822960" y="2286000"/>
+            <a:ext cx="1298448" cy="438912"/>
+          </a:xfrm>
+          <a:prstGeom prst="rect">
+            <a:avLst/>
+          </a:prstGeom>
+          <a:noFill/>
+          <a:ln/>
+        </p:spPr>
+        <p:txBody>
+          <a:bodyPr wrap="square" lIns="0" tIns="0" rIns="0" bIns="0" rtlCol="0" anchor="ctr"/>
+          <a:lstStyle/>
+          <a:p>
+            <a:pPr indent="0" marL="0">
+              <a:buNone/>
+            </a:pPr>
+            <a:r>
+              <a:rPr lang="en-US" sz="2200" b="1" dirty="0">
+                <a:solidFill>
+                  <a:srgbClr val="C0392B"/>
+                </a:solidFill>
+                <a:latin typeface="Cambria" pitchFamily="34" charset="0"/>
+                <a:ea typeface="Cambria" pitchFamily="34" charset="-122"/>
+                <a:cs typeface="Cambria" pitchFamily="34" charset="-120"/>
+              </a:rPr>
+              <a:t>≈85%</a:t>
+            </a:r>
+            <a:endParaRPr lang="en-US" sz="2200" dirty="0"/>
+          </a:p>
+        </p:txBody>
+      </p:sp>
+      <p:sp>
+        <p:nvSpPr>
+          <p:cNvPr id="7" name="Text 5"/>
+          <p:cNvSpPr txBox="1"/>
+          <p:nvPr/>
+        </p:nvSpPr>
+        <p:spPr>
+          <a:xfrm>
+            <a:off x="2231136" y="2157984"/>
+            <a:ext cx="3931920" cy="685800"/>
+          </a:xfrm>
+          <a:prstGeom prst="rect">
+            <a:avLst/>
+          </a:prstGeom>
+          <a:noFill/>
+          <a:ln/>
+        </p:spPr>
+        <p:txBody>
+          <a:bodyPr wrap="square" lIns="0" tIns="0" rIns="0" bIns="0" rtlCol="0" anchor="ctr"/>
+          <a:lstStyle/>
+          <a:p>
+            <a:pPr indent="0" marL="0">
+              <a:buNone/>
+            </a:pPr>
+            <a:r>
+              <a:rPr lang="en-US" sz="1300" b="1" dirty="0">
+                <a:solidFill>
+                  <a:srgbClr val="13202B"/>
+                </a:solidFill>
+                <a:latin typeface="Calibri" pitchFamily="34" charset="0"/>
+                <a:ea typeface="Calibri" pitchFamily="34" charset="-122"/>
+                <a:cs typeface="Calibri" pitchFamily="34" charset="-120"/>
+              </a:rPr>
+              <a:t>The floor stays empty to 2030</a:t>
+            </a:r>
+            <a:endParaRPr lang="en-US" sz="1300" dirty="0"/>
+          </a:p>
+        </p:txBody>
+      </p:sp>
+      <p:sp>
+        <p:nvSpPr>
+          <p:cNvPr id="8" name="Text 6"/>
+          <p:cNvSpPr txBox="1"/>
+          <p:nvPr/>
+        </p:nvSpPr>
+        <p:spPr>
+          <a:xfrm>
+            <a:off x="6327648" y="2157984"/>
+            <a:ext cx="5029200" cy="685800"/>
+          </a:xfrm>
+          <a:prstGeom prst="rect">
+            <a:avLst/>
+          </a:prstGeom>
+          <a:noFill/>
+          <a:ln/>
+        </p:spPr>
+        <p:txBody>
+          <a:bodyPr wrap="square" lIns="0" tIns="0" rIns="0" bIns="0" rtlCol="0" anchor="ctr"/>
+          <a:lstStyle/>
+          <a:p>
+            <a:pPr indent="0" marL="0">
+              <a:buNone/>
+            </a:pPr>
+            <a:r>
+              <a:rPr lang="en-US" sz="1100" dirty="0">
+                <a:solidFill>
+                  <a:srgbClr val="5A6E7C"/>
+                </a:solidFill>
+                <a:latin typeface="Calibri" pitchFamily="34" charset="0"/>
+                <a:ea typeface="Calibri" pitchFamily="34" charset="-122"/>
+                <a:cs typeface="Calibri" pitchFamily="34" charset="-120"/>
+              </a:rPr>
+              <a:t>The codifying bill is bipartisan — Moreno (R) and Slotkin (D) — and framed as security, not climate. A chamber flipping in November does not touch it.</a:t>
+            </a:r>
+            <a:endParaRPr lang="en-US" sz="1100" dirty="0"/>
+          </a:p>
+        </p:txBody>
+      </p:sp>
+      <p:sp>
+        <p:nvSpPr>
+          <p:cNvPr id="9" name="Shape 7"/>
+          <p:cNvSpPr/>
+          <p:nvPr/>
+        </p:nvSpPr>
+        <p:spPr>
+          <a:xfrm>
+            <a:off x="566928" y="3063240"/>
+            <a:ext cx="11027664" cy="923544"/>
+          </a:xfrm>
+          <a:prstGeom prst="roundRect">
+            <a:avLst>
+              <a:gd name="adj" fmla="val 5941"/>
+            </a:avLst>
+          </a:prstGeom>
+          <a:solidFill>
+            <a:srgbClr val="E9F0F4"/>
+          </a:solidFill>
+          <a:ln w="9525">
+            <a:solidFill>
+              <a:srgbClr val="D6E2E9"/>
+            </a:solidFill>
+            <a:prstDash val="solid"/>
+          </a:ln>
+        </p:spPr>
+      </p:sp>
+      <p:sp>
+        <p:nvSpPr>
+          <p:cNvPr id="10" name="Text 8"/>
+          <p:cNvSpPr txBox="1"/>
+          <p:nvPr/>
+        </p:nvSpPr>
+        <p:spPr>
+          <a:xfrm>
+            <a:off x="822960" y="3319272"/>
+            <a:ext cx="1298448" cy="438912"/>
+          </a:xfrm>
+          <a:prstGeom prst="rect">
+            <a:avLst/>
+          </a:prstGeom>
+          <a:noFill/>
+          <a:ln/>
+        </p:spPr>
+        <p:txBody>
+          <a:bodyPr wrap="square" lIns="0" tIns="0" rIns="0" bIns="0" rtlCol="0" anchor="ctr"/>
+          <a:lstStyle/>
+          <a:p>
+            <a:pPr indent="0" marL="0">
+              <a:buNone/>
+            </a:pPr>
+            <a:r>
+              <a:rPr lang="en-US" sz="2200" b="1" dirty="0">
+                <a:solidFill>
+                  <a:srgbClr val="D99A16"/>
+                </a:solidFill>
+                <a:latin typeface="Cambria" pitchFamily="34" charset="0"/>
+                <a:ea typeface="Cambria" pitchFamily="34" charset="-122"/>
+                <a:cs typeface="Cambria" pitchFamily="34" charset="-120"/>
+              </a:rPr>
+              <a:t>≈25%</a:t>
+            </a:r>
+            <a:endParaRPr lang="en-US" sz="2200" dirty="0"/>
+          </a:p>
+        </p:txBody>
+      </p:sp>
+      <p:sp>
+        <p:nvSpPr>
+          <p:cNvPr id="11" name="Text 9"/>
+          <p:cNvSpPr txBox="1"/>
+          <p:nvPr/>
+        </p:nvSpPr>
+        <p:spPr>
+          <a:xfrm>
+            <a:off x="2231136" y="3191256"/>
+            <a:ext cx="3931920" cy="685800"/>
+          </a:xfrm>
+          <a:prstGeom prst="rect">
+            <a:avLst/>
+          </a:prstGeom>
+          <a:noFill/>
+          <a:ln/>
+        </p:spPr>
+        <p:txBody>
+          <a:bodyPr wrap="square" lIns="0" tIns="0" rIns="0" bIns="0" rtlCol="0" anchor="ctr"/>
+          <a:lstStyle/>
+          <a:p>
+            <a:pPr indent="0" marL="0">
+              <a:buNone/>
+            </a:pPr>
+            <a:r>
+              <a:rPr lang="en-US" sz="1300" b="1" dirty="0">
+                <a:solidFill>
+                  <a:srgbClr val="13202B"/>
+                </a:solidFill>
+                <a:latin typeface="Calibri" pitchFamily="34" charset="0"/>
+                <a:ea typeface="Calibri" pitchFamily="34" charset="-122"/>
+                <a:cs typeface="Calibri" pitchFamily="34" charset="-120"/>
+              </a:rPr>
+              <a:t>A purchase credit restored and in effect before 2029</a:t>
+            </a:r>
+            <a:endParaRPr lang="en-US" sz="1300" dirty="0"/>
+          </a:p>
+        </p:txBody>
+      </p:sp>
+      <p:sp>
+        <p:nvSpPr>
+          <p:cNvPr id="12" name="Text 10"/>
+          <p:cNvSpPr txBox="1"/>
+          <p:nvPr/>
+        </p:nvSpPr>
+        <p:spPr>
+          <a:xfrm>
+            <a:off x="6327648" y="3191256"/>
+            <a:ext cx="5029200" cy="685800"/>
+          </a:xfrm>
+          <a:prstGeom prst="rect">
+            <a:avLst/>
+          </a:prstGeom>
+          <a:noFill/>
+          <a:ln/>
+        </p:spPr>
+        <p:txBody>
+          <a:bodyPr wrap="square" lIns="0" tIns="0" rIns="0" bIns="0" rtlCol="0" anchor="ctr"/>
+          <a:lstStyle/>
+          <a:p>
+            <a:pPr indent="0" marL="0">
+              <a:buNone/>
+            </a:pPr>
+            <a:r>
+              <a:rPr lang="en-US" sz="1100" dirty="0">
+                <a:solidFill>
+                  <a:srgbClr val="5A6E7C"/>
+                </a:solidFill>
+                <a:latin typeface="Calibri" pitchFamily="34" charset="0"/>
+                <a:ea typeface="Calibri" pitchFamily="34" charset="-122"/>
+                <a:cs typeface="Calibri" pitchFamily="34" charset="-120"/>
+              </a:rPr>
+              <a:t>A flipped chamber still faces a veto. The loan-interest deduction sunsets in December 2028.</a:t>
+            </a:r>
+            <a:endParaRPr lang="en-US" sz="1100" dirty="0"/>
+          </a:p>
+        </p:txBody>
+      </p:sp>
+      <p:sp>
+        <p:nvSpPr>
+          <p:cNvPr id="13" name="Shape 11"/>
+          <p:cNvSpPr/>
+          <p:nvPr/>
+        </p:nvSpPr>
+        <p:spPr>
+          <a:xfrm>
+            <a:off x="566928" y="4096512"/>
+            <a:ext cx="11027664" cy="923544"/>
+          </a:xfrm>
+          <a:prstGeom prst="roundRect">
+            <a:avLst>
+              <a:gd name="adj" fmla="val 5941"/>
+            </a:avLst>
+          </a:prstGeom>
+          <a:solidFill>
+            <a:srgbClr val="E9F0F4"/>
+          </a:solidFill>
+          <a:ln w="9525">
+            <a:solidFill>
+              <a:srgbClr val="D6E2E9"/>
+            </a:solidFill>
+            <a:prstDash val="solid"/>
+          </a:ln>
+        </p:spPr>
+      </p:sp>
+      <p:sp>
+        <p:nvSpPr>
+          <p:cNvPr id="14" name="Text 12"/>
+          <p:cNvSpPr txBox="1"/>
+          <p:nvPr/>
+        </p:nvSpPr>
+        <p:spPr>
+          <a:xfrm>
+            <a:off x="822960" y="4352544"/>
+            <a:ext cx="1298448" cy="438912"/>
+          </a:xfrm>
+          <a:prstGeom prst="rect">
+            <a:avLst/>
+          </a:prstGeom>
+          <a:noFill/>
+          <a:ln/>
+        </p:spPr>
+        <p:txBody>
+          <a:bodyPr wrap="square" lIns="0" tIns="0" rIns="0" bIns="0" rtlCol="0" anchor="ctr"/>
+          <a:lstStyle/>
+          <a:p>
+            <a:pPr indent="0" marL="0">
+              <a:buNone/>
+            </a:pPr>
+            <a:r>
+              <a:rPr lang="en-US" sz="2200" b="1" dirty="0">
+                <a:solidFill>
+                  <a:srgbClr val="D99A16"/>
+                </a:solidFill>
+                <a:latin typeface="Cambria" pitchFamily="34" charset="0"/>
+                <a:ea typeface="Cambria" pitchFamily="34" charset="-122"/>
+                <a:cs typeface="Cambria" pitchFamily="34" charset="-120"/>
+              </a:rPr>
+              <a:t>≈20%</a:t>
+            </a:r>
+            <a:endParaRPr lang="en-US" sz="2200" dirty="0"/>
+          </a:p>
+        </p:txBody>
+      </p:sp>
+      <p:sp>
+        <p:nvSpPr>
+          <p:cNvPr id="15" name="Text 13"/>
+          <p:cNvSpPr txBox="1"/>
+          <p:nvPr/>
+        </p:nvSpPr>
+        <p:spPr>
+          <a:xfrm>
+            <a:off x="2231136" y="4224528"/>
+            <a:ext cx="3931920" cy="685800"/>
+          </a:xfrm>
+          <a:prstGeom prst="rect">
+            <a:avLst/>
+          </a:prstGeom>
+          <a:noFill/>
+          <a:ln/>
+        </p:spPr>
+        <p:txBody>
+          <a:bodyPr wrap="square" lIns="0" tIns="0" rIns="0" bIns="0" rtlCol="0" anchor="ctr"/>
+          <a:lstStyle/>
+          <a:p>
+            <a:pPr indent="0" marL="0">
+              <a:buNone/>
+            </a:pPr>
+            <a:r>
+              <a:rPr lang="en-US" sz="1300" b="1" dirty="0">
+                <a:solidFill>
+                  <a:srgbClr val="13202B"/>
+                </a:solidFill>
+                <a:latin typeface="Calibri" pitchFamily="34" charset="0"/>
+                <a:ea typeface="Calibri" pitchFamily="34" charset="-122"/>
+                <a:cs typeface="Calibri" pitchFamily="34" charset="-120"/>
+              </a:rPr>
+              <a:t>A U.S. EV price floor below $25,000 before 2030</a:t>
+            </a:r>
+            <a:endParaRPr lang="en-US" sz="1300" dirty="0"/>
+          </a:p>
+        </p:txBody>
+      </p:sp>
+      <p:sp>
+        <p:nvSpPr>
+          <p:cNvPr id="16" name="Text 14"/>
+          <p:cNvSpPr txBox="1"/>
+          <p:nvPr/>
+        </p:nvSpPr>
+        <p:spPr>
+          <a:xfrm>
+            <a:off x="6327648" y="4224528"/>
+            <a:ext cx="5029200" cy="685800"/>
+          </a:xfrm>
+          <a:prstGeom prst="rect">
+            <a:avLst/>
+          </a:prstGeom>
+          <a:noFill/>
+          <a:ln/>
+        </p:spPr>
+        <p:txBody>
+          <a:bodyPr wrap="square" lIns="0" tIns="0" rIns="0" bIns="0" rtlCol="0" anchor="ctr"/>
+          <a:lstStyle/>
+          <a:p>
+            <a:pPr indent="0" marL="0">
+              <a:buNone/>
+            </a:pPr>
+            <a:r>
+              <a:rPr lang="en-US" sz="1100" dirty="0">
+                <a:solidFill>
+                  <a:srgbClr val="5A6E7C"/>
+                </a:solidFill>
+                <a:latin typeface="Calibri" pitchFamily="34" charset="0"/>
+                <a:ea typeface="Calibri" pitchFamily="34" charset="-122"/>
+                <a:cs typeface="Calibri" pitchFamily="34" charset="-120"/>
+              </a:rPr>
+              <a:t>Ford's $30,000 pickup arrives in 2027 on LFP cells. Platform economics reach $30k, not $22k.</a:t>
+            </a:r>
+            <a:endParaRPr lang="en-US" sz="1100" dirty="0"/>
+          </a:p>
+        </p:txBody>
+      </p:sp>
+      <p:sp>
+        <p:nvSpPr>
+          <p:cNvPr id="17" name="Shape 15"/>
+          <p:cNvSpPr/>
+          <p:nvPr/>
+        </p:nvSpPr>
+        <p:spPr>
+          <a:xfrm>
+            <a:off x="566928" y="5129784"/>
+            <a:ext cx="11027664" cy="923544"/>
+          </a:xfrm>
+          <a:prstGeom prst="roundRect">
+            <a:avLst>
+              <a:gd name="adj" fmla="val 5941"/>
+            </a:avLst>
+          </a:prstGeom>
+          <a:solidFill>
+            <a:srgbClr val="E9F0F4"/>
+          </a:solidFill>
+          <a:ln w="9525">
+            <a:solidFill>
+              <a:srgbClr val="D6E2E9"/>
+            </a:solidFill>
+            <a:prstDash val="solid"/>
+          </a:ln>
+        </p:spPr>
+      </p:sp>
+      <p:sp>
+        <p:nvSpPr>
+          <p:cNvPr id="18" name="Text 16"/>
+          <p:cNvSpPr txBox="1"/>
+          <p:nvPr/>
+        </p:nvSpPr>
+        <p:spPr>
+          <a:xfrm>
+            <a:off x="822960" y="5385816"/>
+            <a:ext cx="1298448" cy="438912"/>
+          </a:xfrm>
+          <a:prstGeom prst="rect">
+            <a:avLst/>
+          </a:prstGeom>
+          <a:noFill/>
+          <a:ln/>
+        </p:spPr>
+        <p:txBody>
+          <a:bodyPr wrap="square" lIns="0" tIns="0" rIns="0" bIns="0" rtlCol="0" anchor="ctr"/>
+          <a:lstStyle/>
+          <a:p>
+            <a:pPr indent="0" marL="0">
+              <a:buNone/>
+            </a:pPr>
+            <a:r>
+              <a:rPr lang="en-US" sz="2200" b="1" dirty="0">
+                <a:solidFill>
+                  <a:srgbClr val="3081AE"/>
+                </a:solidFill>
+                <a:latin typeface="Cambria" pitchFamily="34" charset="0"/>
+                <a:ea typeface="Cambria" pitchFamily="34" charset="-122"/>
+                <a:cs typeface="Cambria" pitchFamily="34" charset="-120"/>
+              </a:rPr>
+              <a:t>6–10%</a:t>
+            </a:r>
+            <a:endParaRPr lang="en-US" sz="2200" dirty="0"/>
+          </a:p>
+        </p:txBody>
+      </p:sp>
+      <p:sp>
+        <p:nvSpPr>
+          <p:cNvPr id="19" name="Text 17"/>
+          <p:cNvSpPr txBox="1"/>
+          <p:nvPr/>
+        </p:nvSpPr>
+        <p:spPr>
+          <a:xfrm>
+            <a:off x="2231136" y="5257800"/>
+            <a:ext cx="3931920" cy="685800"/>
+          </a:xfrm>
+          <a:prstGeom prst="rect">
+            <a:avLst/>
+          </a:prstGeom>
+          <a:noFill/>
+          <a:ln/>
+        </p:spPr>
+        <p:txBody>
+          <a:bodyPr wrap="square" lIns="0" tIns="0" rIns="0" bIns="0" rtlCol="0" anchor="ctr"/>
+          <a:lstStyle/>
+          <a:p>
+            <a:pPr indent="0" marL="0">
+              <a:buNone/>
+            </a:pPr>
+            <a:r>
+              <a:rPr lang="en-US" sz="1300" b="1" dirty="0">
+                <a:solidFill>
+                  <a:srgbClr val="13202B"/>
+                </a:solidFill>
+                <a:latin typeface="Calibri" pitchFamily="34" charset="0"/>
+                <a:ea typeface="Calibri" pitchFamily="34" charset="-122"/>
+                <a:cs typeface="Calibri" pitchFamily="34" charset="-120"/>
+              </a:rPr>
+              <a:t>BEV share range through 2030</a:t>
+            </a:r>
+            <a:endParaRPr lang="en-US" sz="1300" dirty="0"/>
+          </a:p>
+        </p:txBody>
+      </p:sp>
+      <p:sp>
+        <p:nvSpPr>
+          <p:cNvPr id="20" name="Text 18"/>
+          <p:cNvSpPr txBox="1"/>
+          <p:nvPr/>
+        </p:nvSpPr>
+        <p:spPr>
+          <a:xfrm>
+            <a:off x="6327648" y="5257800"/>
+            <a:ext cx="5029200" cy="685800"/>
+          </a:xfrm>
+          <a:prstGeom prst="rect">
+            <a:avLst/>
+          </a:prstGeom>
+          <a:noFill/>
+          <a:ln/>
+        </p:spPr>
+        <p:txBody>
+          <a:bodyPr wrap="square" lIns="0" tIns="0" rIns="0" bIns="0" rtlCol="0" anchor="ctr"/>
+          <a:lstStyle/>
+          <a:p>
+            <a:pPr indent="0" marL="0">
+              <a:buNone/>
+            </a:pPr>
+            <a:r>
+              <a:rPr lang="en-US" sz="1100" dirty="0">
+                <a:solidFill>
+                  <a:srgbClr val="5A6E7C"/>
+                </a:solidFill>
+                <a:latin typeface="Calibri" pitchFamily="34" charset="0"/>
+                <a:ea typeface="Calibri" pitchFamily="34" charset="-122"/>
+                <a:cs typeface="Calibri" pitchFamily="34" charset="-120"/>
+              </a:rPr>
+              <a:t>Against 22%+ in Europe. Expect divergence, not recovery.</a:t>
+            </a:r>
+            <a:endParaRPr lang="en-US" sz="1100" dirty="0"/>
+          </a:p>
+        </p:txBody>
+      </p:sp>
+      <p:sp>
+        <p:nvSpPr>
+          <p:cNvPr id="21" name="Text 19"/>
+          <p:cNvSpPr txBox="1"/>
+          <p:nvPr/>
+        </p:nvSpPr>
+        <p:spPr>
+          <a:xfrm>
+            <a:off x="566928" y="6272784"/>
+            <a:ext cx="11027664" cy="475488"/>
+          </a:xfrm>
+          <a:prstGeom prst="rect">
+            <a:avLst/>
+          </a:prstGeom>
+          <a:noFill/>
+          <a:ln/>
+        </p:spPr>
+        <p:txBody>
+          <a:bodyPr wrap="square" lIns="0" tIns="0" rIns="0" bIns="0" rtlCol="0" anchor="ctr"/>
+          <a:lstStyle/>
+          <a:p>
+            <a:pPr indent="0" marL="0">
+              <a:buNone/>
+            </a:pPr>
+            <a:r>
+              <a:rPr lang="en-US" sz="1200" i="1" dirty="0">
+                <a:solidFill>
+                  <a:srgbClr val="13202B"/>
+                </a:solidFill>
+                <a:latin typeface="Calibri" pitchFamily="34" charset="0"/>
+                <a:ea typeface="Calibri" pitchFamily="34" charset="-122"/>
+                <a:cs typeface="Calibri" pitchFamily="34" charset="-120"/>
+              </a:rPr>
+              <a:t>The underweighted change: the EPA repealed the 2009 endangerment finding in February 2026, on top of the December 2025 CAFE rollback. Automakers no longer have a compliance reason to build EVs at all — structurally larger than the lost subsidy.</a:t>
+            </a:r>
+            <a:endParaRPr lang="en-US" sz="1200" dirty="0"/>
+          </a:p>
+        </p:txBody>
+      </p:sp>
+    </p:spTree>
+  </p:cSld>
+  <p:clrMapOvr>
+    <a:masterClrMapping/>
+  </p:clrMapOvr>
+</p:sld>
+</file>
+
+<file path=ppt/slides/slide15.xml><?xml version="1.0" encoding="utf-8"?>
+<p:sld xmlns:a="http://schemas.openxmlformats.org/drawingml/2006/main" xmlns:r="http://schemas.openxmlformats.org/officeDocument/2006/relationships" xmlns:p="http://schemas.openxmlformats.org/presentationml/2006/main">
+  <p:cSld name="Slide 15">
     <p:bg>
       <p:bgPr>
         <a:solidFill>
